--- a/多智能体协同技术分享/从一个人爽到一群人接住：TabTin 与 AI 协作难题.pptx
+++ b/多智能体协同技术分享/从一个人爽到一群人接住：TabTin 与 AI 协作难题.pptx
@@ -3,26 +3,26 @@
 <p:presentation xmlns:a="http://schemas.openxmlformats.org/drawingml/2006/main" xmlns:r="http://schemas.openxmlformats.org/officeDocument/2006/relationships" xmlns:p="http://schemas.openxmlformats.org/presentationml/2006/main" strictFirstAndLastChars="0" autoCompressPictures="0">
   <p:sldMasterIdLst>
     <p:sldMasterId id="2147483648" r:id="rId1"/>
-    <p:sldMasterId id="2147483660" r:id="rId3"/>
+    <p:sldMasterId id="2147483660" r:id="rId2"/>
   </p:sldMasterIdLst>
   <p:notesMasterIdLst>
-    <p:notesMasterId r:id="rId5"/>
+    <p:notesMasterId r:id="rId17"/>
   </p:notesMasterIdLst>
   <p:sldIdLst>
-    <p:sldId id="256" r:id="rId4"/>
-    <p:sldId id="257" r:id="rId6"/>
-    <p:sldId id="258" r:id="rId7"/>
-    <p:sldId id="259" r:id="rId8"/>
-    <p:sldId id="260" r:id="rId9"/>
-    <p:sldId id="261" r:id="rId10"/>
-    <p:sldId id="262" r:id="rId11"/>
-    <p:sldId id="263" r:id="rId12"/>
-    <p:sldId id="264" r:id="rId13"/>
-    <p:sldId id="265" r:id="rId14"/>
-    <p:sldId id="266" r:id="rId15"/>
-    <p:sldId id="267" r:id="rId16"/>
-    <p:sldId id="268" r:id="rId17"/>
-    <p:sldId id="269" r:id="rId18"/>
+    <p:sldId id="256" r:id="rId3"/>
+    <p:sldId id="257" r:id="rId4"/>
+    <p:sldId id="258" r:id="rId5"/>
+    <p:sldId id="259" r:id="rId6"/>
+    <p:sldId id="260" r:id="rId7"/>
+    <p:sldId id="261" r:id="rId8"/>
+    <p:sldId id="262" r:id="rId9"/>
+    <p:sldId id="263" r:id="rId10"/>
+    <p:sldId id="264" r:id="rId11"/>
+    <p:sldId id="265" r:id="rId12"/>
+    <p:sldId id="266" r:id="rId13"/>
+    <p:sldId id="267" r:id="rId14"/>
+    <p:sldId id="268" r:id="rId15"/>
+    <p:sldId id="269" r:id="rId16"/>
   </p:sldIdLst>
   <p:sldSz cx="12192000" cy="6858000"/>
   <p:notesSz cx="6858000" cy="9144000"/>
@@ -356,6 +356,7 @@
           <a:p>
             <a:fld id="{B7268E1E-0E44-426D-905E-8AD9B19D2182}" type="datetimeFigureOut">
               <a:rPr lang="cs-CZ" smtClean="0"/>
+              <a:t>14.09.2026</a:t>
             </a:fld>
             <a:endParaRPr lang="cs-CZ"/>
           </a:p>
@@ -419,39 +420,35 @@
           <a:p>
             <a:pPr lvl="0"/>
             <a:r>
-              <a:rPr lang="en-US" smtClean="0"/>
+              <a:rPr lang="en-US"/>
               <a:t>Click to edit Master text styles</a:t>
             </a:r>
-            <a:endParaRPr lang="en-US" smtClean="0"/>
           </a:p>
           <a:p>
             <a:pPr lvl="1"/>
             <a:r>
-              <a:rPr lang="en-US" smtClean="0"/>
+              <a:rPr lang="en-US"/>
               <a:t>Second level</a:t>
             </a:r>
-            <a:endParaRPr lang="en-US" smtClean="0"/>
           </a:p>
           <a:p>
             <a:pPr lvl="2"/>
             <a:r>
-              <a:rPr lang="en-US" smtClean="0"/>
+              <a:rPr lang="en-US"/>
               <a:t>Third level</a:t>
             </a:r>
-            <a:endParaRPr lang="en-US" smtClean="0"/>
           </a:p>
           <a:p>
             <a:pPr lvl="3"/>
             <a:r>
-              <a:rPr lang="en-US" smtClean="0"/>
+              <a:rPr lang="en-US"/>
               <a:t>Fourth level</a:t>
             </a:r>
-            <a:endParaRPr lang="en-US" smtClean="0"/>
           </a:p>
           <a:p>
             <a:pPr lvl="4"/>
             <a:r>
-              <a:rPr lang="en-US" smtClean="0"/>
+              <a:rPr lang="en-US"/>
               <a:t>Fifth level</a:t>
             </a:r>
             <a:endParaRPr lang="cs-CZ"/>
@@ -518,6 +515,7 @@
           <a:p>
             <a:fld id="{871B2431-D351-4C6E-A3CF-9DFAC0E3E050}" type="slidenum">
               <a:rPr lang="cs-CZ" smtClean="0"/>
+              <a:t>‹#›</a:t>
             </a:fld>
             <a:endParaRPr lang="cs-CZ"/>
           </a:p>
@@ -664,7 +662,9 @@
               <a:defRPr sz="1200"/>
             </a:lvl1pPr>
           </a:lstStyle>
-          <a:p/>
+          <a:p>
+            <a:endParaRPr/>
+          </a:p>
         </p:txBody>
       </p:sp>
       <p:sp>
@@ -695,10 +695,9 @@
           </a:lstStyle>
           <a:p>
             <a:r>
-              <a:rPr lang="cs-CZ" smtClean="0"/>
+              <a:rPr lang="cs-CZ"/>
               <a:t>1.7.2013</a:t>
             </a:r>
-            <a:endParaRPr lang="cs-CZ" smtClean="0"/>
           </a:p>
         </p:txBody>
       </p:sp>
@@ -730,7 +729,9 @@
         <p:txBody>
           <a:bodyPr vert="horz" lIns="91440" tIns="45720" rIns="91440" bIns="45720" rtlCol="0" anchor="ctr"/>
           <a:lstStyle/>
-          <a:p/>
+          <a:p>
+            <a:endParaRPr/>
+          </a:p>
         </p:txBody>
       </p:sp>
       <p:sp>
@@ -773,11 +774,6 @@
               </a:rPr>
               <a:t>大家好，今天分享一个我最近偶然翻到的开源项目 TabTin。</a:t>
             </a:r>
-            <a:endParaRPr lang="en-US" sz="1400" b="0" i="0" u="none" strike="noStrike">
-              <a:solidFill>
-                <a:srgbClr val="000000"/>
-              </a:solidFill>
-            </a:endParaRPr>
           </a:p>
           <a:p>
             <a:pPr marL="0" indent="0" algn="l">
@@ -793,11 +789,6 @@
               </a:rPr>
               <a:t>但我不打算只讲这个项目本身，我想从一个大家都有体感的问题聊起：为什么 AI 让我们个人干活快了，团队却没跟着快起来？</a:t>
             </a:r>
-            <a:endParaRPr lang="en-US" sz="1400" b="0" i="0" u="none" strike="noStrike">
-              <a:solidFill>
-                <a:srgbClr val="000000"/>
-              </a:solidFill>
-            </a:endParaRPr>
           </a:p>
           <a:p>
             <a:pPr marL="0" indent="0" algn="l">
@@ -813,11 +804,6 @@
               </a:rPr>
               <a:t>TabTin 是这条线上的一个观察样本，我们会看到它和多智能体协同这个很热的方向，其实在填同一道沟。</a:t>
             </a:r>
-            <a:endParaRPr lang="en-US" sz="1400" b="0" i="0" u="none" strike="noStrike">
-              <a:solidFill>
-                <a:srgbClr val="000000"/>
-              </a:solidFill>
-            </a:endParaRPr>
           </a:p>
         </p:txBody>
       </p:sp>
@@ -847,7 +833,9 @@
               <a:defRPr sz="1200"/>
             </a:lvl1pPr>
           </a:lstStyle>
-          <a:p/>
+          <a:p>
+            <a:endParaRPr/>
+          </a:p>
         </p:txBody>
       </p:sp>
       <p:sp>
@@ -878,10 +866,9 @@
           </a:lstStyle>
           <a:p>
             <a:r>
-              <a:rPr lang="cs-CZ" smtClean="0"/>
+              <a:rPr lang="cs-CZ"/>
               <a:t>‹#›</a:t>
             </a:r>
-            <a:endParaRPr lang="cs-CZ" smtClean="0"/>
           </a:p>
         </p:txBody>
       </p:sp>
@@ -936,7 +923,9 @@
               <a:defRPr sz="1200"/>
             </a:lvl1pPr>
           </a:lstStyle>
-          <a:p/>
+          <a:p>
+            <a:endParaRPr/>
+          </a:p>
         </p:txBody>
       </p:sp>
       <p:sp>
@@ -967,10 +956,9 @@
           </a:lstStyle>
           <a:p>
             <a:r>
-              <a:rPr lang="cs-CZ" smtClean="0"/>
+              <a:rPr lang="cs-CZ"/>
               <a:t>1.7.2013</a:t>
             </a:r>
-            <a:endParaRPr lang="cs-CZ" smtClean="0"/>
           </a:p>
         </p:txBody>
       </p:sp>
@@ -1002,7 +990,9 @@
         <p:txBody>
           <a:bodyPr vert="horz" lIns="91440" tIns="45720" rIns="91440" bIns="45720" rtlCol="0" anchor="ctr"/>
           <a:lstStyle/>
-          <a:p/>
+          <a:p>
+            <a:endParaRPr/>
+          </a:p>
         </p:txBody>
       </p:sp>
       <p:sp>
@@ -1045,11 +1035,6 @@
               </a:rPr>
               <a:t>这个项目不是套壳。它开放的是真实产品代码：Electron 桌面端、移动端、服务端、Agent Runtime、实时协作、管理后台，AGPL 协议，可以自己部署。</a:t>
             </a:r>
-            <a:endParaRPr lang="en-US" sz="1400" b="0" i="0" u="none" strike="noStrike">
-              <a:solidFill>
-                <a:srgbClr val="000000"/>
-              </a:solidFill>
-            </a:endParaRPr>
           </a:p>
           <a:p>
             <a:pPr marL="0" indent="0" algn="l">
@@ -1065,11 +1050,6 @@
               </a:rPr>
               <a:t>我读源码时注意到三个架构决策，比功能列表更能说明它想做什么。</a:t>
             </a:r>
-            <a:endParaRPr lang="en-US" sz="1400" b="0" i="0" u="none" strike="noStrike">
-              <a:solidFill>
-                <a:srgbClr val="000000"/>
-              </a:solidFill>
-            </a:endParaRPr>
           </a:p>
           <a:p>
             <a:pPr marL="0" indent="0" algn="l">
@@ -1085,11 +1065,6 @@
               </a:rPr>
               <a:t>第一，Agent 和 Device 是解耦的——Agent 表示"谁参与"，Device 表示"在哪执行"。同一个 Agent 可以在不同电脑上跑，你手机上发起的任务在桌面 Daemon 上执行。</a:t>
             </a:r>
-            <a:endParaRPr lang="en-US" sz="1400" b="0" i="0" u="none" strike="noStrike">
-              <a:solidFill>
-                <a:srgbClr val="000000"/>
-              </a:solidFill>
-            </a:endParaRPr>
           </a:p>
           <a:p>
             <a:pPr marL="0" indent="0" algn="l">
@@ -1105,11 +1080,6 @@
               </a:rPr>
               <a:t>第二，交接不等于共享目录。你的 Workspace 是私有的，任务交接时只带引用材料和上下文，不会把你的整个本地目录甩给同事。</a:t>
             </a:r>
-            <a:endParaRPr lang="en-US" sz="1400" b="0" i="0" u="none" strike="noStrike">
-              <a:solidFill>
-                <a:srgbClr val="000000"/>
-              </a:solidFill>
-            </a:endParaRPr>
           </a:p>
           <a:p>
             <a:pPr marL="0" indent="0" algn="l">
@@ -1125,11 +1095,6 @@
               </a:rPr>
               <a:t>第三，它的检查点叫 Shadow Git——在用户项目目录外面维护一个隐藏仓库，通过 core.worktree 指向你的项目，不污染你自己的 .git。这是"工作可交接"在工程上的具体落地。</a:t>
             </a:r>
-            <a:endParaRPr lang="en-US" sz="1400" b="0" i="0" u="none" strike="noStrike">
-              <a:solidFill>
-                <a:srgbClr val="000000"/>
-              </a:solidFill>
-            </a:endParaRPr>
           </a:p>
           <a:p>
             <a:pPr marL="0" indent="0" algn="l">
@@ -1145,11 +1110,6 @@
               </a:rPr>
               <a:t>当然它现在还是 Public Preview，成熟度参差不齐，这点要有预期。</a:t>
             </a:r>
-            <a:endParaRPr lang="en-US" sz="1400" b="0" i="0" u="none" strike="noStrike">
-              <a:solidFill>
-                <a:srgbClr val="000000"/>
-              </a:solidFill>
-            </a:endParaRPr>
           </a:p>
         </p:txBody>
       </p:sp>
@@ -1179,7 +1139,9 @@
               <a:defRPr sz="1200"/>
             </a:lvl1pPr>
           </a:lstStyle>
-          <a:p/>
+          <a:p>
+            <a:endParaRPr/>
+          </a:p>
         </p:txBody>
       </p:sp>
       <p:sp>
@@ -1210,10 +1172,9 @@
           </a:lstStyle>
           <a:p>
             <a:r>
-              <a:rPr lang="cs-CZ" smtClean="0"/>
+              <a:rPr lang="cs-CZ"/>
               <a:t>‹#›</a:t>
             </a:r>
-            <a:endParaRPr lang="cs-CZ" smtClean="0"/>
           </a:p>
         </p:txBody>
       </p:sp>
@@ -1268,7 +1229,9 @@
               <a:defRPr sz="1200"/>
             </a:lvl1pPr>
           </a:lstStyle>
-          <a:p/>
+          <a:p>
+            <a:endParaRPr/>
+          </a:p>
         </p:txBody>
       </p:sp>
       <p:sp>
@@ -1299,10 +1262,9 @@
           </a:lstStyle>
           <a:p>
             <a:r>
-              <a:rPr lang="cs-CZ" smtClean="0"/>
+              <a:rPr lang="cs-CZ"/>
               <a:t>1.7.2013</a:t>
             </a:r>
-            <a:endParaRPr lang="cs-CZ" smtClean="0"/>
           </a:p>
         </p:txBody>
       </p:sp>
@@ -1334,7 +1296,9 @@
         <p:txBody>
           <a:bodyPr vert="horz" lIns="91440" tIns="45720" rIns="91440" bIns="45720" rtlCol="0" anchor="ctr"/>
           <a:lstStyle/>
-          <a:p/>
+          <a:p>
+            <a:endParaRPr/>
+          </a:p>
         </p:txBody>
       </p:sp>
       <p:sp>
@@ -1377,11 +1341,6 @@
               </a:rPr>
               <a:t>这一页直接对比。</a:t>
             </a:r>
-            <a:endParaRPr lang="en-US" sz="1400" b="0" i="0" u="none" strike="noStrike">
-              <a:solidFill>
-                <a:srgbClr val="000000"/>
-              </a:solidFill>
-            </a:endParaRPr>
           </a:p>
           <a:p>
             <a:pPr marL="0" indent="0" algn="l">
@@ -1397,11 +1356,6 @@
               </a:rPr>
               <a:t>Codex 和 Claude Code 的设计假设从头到尾就是单用户。Codex 是"派发后走开"，所以用内核级沙箱做硬隔离；Claude Code 是"人在终端前盯着"，所以用 hooks 和 /rewind 做软边界。</a:t>
             </a:r>
-            <a:endParaRPr lang="en-US" sz="1400" b="0" i="0" u="none" strike="noStrike">
-              <a:solidFill>
-                <a:srgbClr val="000000"/>
-              </a:solidFill>
-            </a:endParaRPr>
           </a:p>
           <a:p>
             <a:pPr marL="0" indent="0" algn="l">
@@ -1417,11 +1371,6 @@
               </a:rPr>
               <a:t>TabTin 不一样的地方在最后两行：多人协作和工作交接。它假设一个团队，人和 Agent 一起干活。CRDT 让人和 Agent 同时编辑同一份文档；交接时冻结上下文带引用材料，不是把整个目录甩给同事。</a:t>
             </a:r>
-            <a:endParaRPr lang="en-US" sz="1400" b="0" i="0" u="none" strike="noStrike">
-              <a:solidFill>
-                <a:srgbClr val="000000"/>
-              </a:solidFill>
-            </a:endParaRPr>
           </a:p>
           <a:p>
             <a:pPr marL="0" indent="0" algn="l">
@@ -1437,11 +1386,6 @@
               </a:rPr>
               <a:t>但它不是全赢——coding 深度不如那两个，沙箱也不是内核级。它的定位是：Codex 和 Claude Code 把"一个人跟 AI 干活"磨到了极致，TabTin 站在右边那层空白上，解决"一个人干完了怎么让下一个人接得住"。</a:t>
             </a:r>
-            <a:endParaRPr lang="en-US" sz="1400" b="0" i="0" u="none" strike="noStrike">
-              <a:solidFill>
-                <a:srgbClr val="000000"/>
-              </a:solidFill>
-            </a:endParaRPr>
           </a:p>
         </p:txBody>
       </p:sp>
@@ -1471,7 +1415,9 @@
               <a:defRPr sz="1200"/>
             </a:lvl1pPr>
           </a:lstStyle>
-          <a:p/>
+          <a:p>
+            <a:endParaRPr/>
+          </a:p>
         </p:txBody>
       </p:sp>
       <p:sp>
@@ -1502,10 +1448,9 @@
           </a:lstStyle>
           <a:p>
             <a:r>
-              <a:rPr lang="cs-CZ" smtClean="0"/>
+              <a:rPr lang="cs-CZ"/>
               <a:t>‹#›</a:t>
             </a:r>
-            <a:endParaRPr lang="cs-CZ" smtClean="0"/>
           </a:p>
         </p:txBody>
       </p:sp>
@@ -1560,7 +1505,9 @@
               <a:defRPr sz="1200"/>
             </a:lvl1pPr>
           </a:lstStyle>
-          <a:p/>
+          <a:p>
+            <a:endParaRPr/>
+          </a:p>
         </p:txBody>
       </p:sp>
       <p:sp>
@@ -1591,10 +1538,9 @@
           </a:lstStyle>
           <a:p>
             <a:r>
-              <a:rPr lang="cs-CZ" smtClean="0"/>
+              <a:rPr lang="cs-CZ"/>
               <a:t>1.7.2013</a:t>
             </a:r>
-            <a:endParaRPr lang="cs-CZ" smtClean="0"/>
           </a:p>
         </p:txBody>
       </p:sp>
@@ -1626,7 +1572,9 @@
         <p:txBody>
           <a:bodyPr vert="horz" lIns="91440" tIns="45720" rIns="91440" bIns="45720" rtlCol="0" anchor="ctr"/>
           <a:lstStyle/>
-          <a:p/>
+          <a:p>
+            <a:endParaRPr/>
+          </a:p>
         </p:txBody>
       </p:sp>
       <p:sp>
@@ -1669,11 +1617,6 @@
               </a:rPr>
               <a:t>把今天讲的两条路放在一起看。</a:t>
             </a:r>
-            <a:endParaRPr lang="en-US" sz="1400" b="0" i="0" u="none" strike="noStrike">
-              <a:solidFill>
-                <a:srgbClr val="000000"/>
-              </a:solidFill>
-            </a:endParaRPr>
           </a:p>
           <a:p>
             <a:pPr marL="0" indent="0" algn="l">
@@ -1689,11 +1632,6 @@
               </a:rPr>
               <a:t>左边多智能体协同，保护的是 agent 之间的独立视角，不让它在层级汇报中被压平。右边 TabTin，保护的是人之间的工作上下文，不让它在交接中被丢掉。</a:t>
             </a:r>
-            <a:endParaRPr lang="en-US" sz="1400" b="0" i="0" u="none" strike="noStrike">
-              <a:solidFill>
-                <a:srgbClr val="000000"/>
-              </a:solidFill>
-            </a:endParaRPr>
           </a:p>
           <a:p>
             <a:pPr marL="0" indent="0" algn="l">
@@ -1709,11 +1647,6 @@
               </a:rPr>
               <a:t>方向不同，但你看下面这行——它们填的是同一道沟：信息从一个工作主体传到另一个工作主体时，别在"汇报/交接"这一步被压成有损摘要。</a:t>
             </a:r>
-            <a:endParaRPr lang="en-US" sz="1400" b="0" i="0" u="none" strike="noStrike">
-              <a:solidFill>
-                <a:srgbClr val="000000"/>
-              </a:solidFill>
-            </a:endParaRPr>
           </a:p>
           <a:p>
             <a:pPr marL="0" indent="0" algn="l">
@@ -1729,11 +1662,6 @@
               </a:rPr>
               <a:t>这就是为什么我说 TabTin 是个影子——它背后是整个 AI 协作领域正在面对的同一个问题。</a:t>
             </a:r>
-            <a:endParaRPr lang="en-US" sz="1400" b="0" i="0" u="none" strike="noStrike">
-              <a:solidFill>
-                <a:srgbClr val="000000"/>
-              </a:solidFill>
-            </a:endParaRPr>
           </a:p>
         </p:txBody>
       </p:sp>
@@ -1763,7 +1691,9 @@
               <a:defRPr sz="1200"/>
             </a:lvl1pPr>
           </a:lstStyle>
-          <a:p/>
+          <a:p>
+            <a:endParaRPr/>
+          </a:p>
         </p:txBody>
       </p:sp>
       <p:sp>
@@ -1794,10 +1724,9 @@
           </a:lstStyle>
           <a:p>
             <a:r>
-              <a:rPr lang="cs-CZ" smtClean="0"/>
+              <a:rPr lang="cs-CZ"/>
               <a:t>‹#›</a:t>
             </a:r>
-            <a:endParaRPr lang="cs-CZ" smtClean="0"/>
           </a:p>
         </p:txBody>
       </p:sp>
@@ -1852,7 +1781,9 @@
               <a:defRPr sz="1200"/>
             </a:lvl1pPr>
           </a:lstStyle>
-          <a:p/>
+          <a:p>
+            <a:endParaRPr/>
+          </a:p>
         </p:txBody>
       </p:sp>
       <p:sp>
@@ -1883,10 +1814,9 @@
           </a:lstStyle>
           <a:p>
             <a:r>
-              <a:rPr lang="cs-CZ" smtClean="0"/>
+              <a:rPr lang="cs-CZ"/>
               <a:t>1.7.2013</a:t>
             </a:r>
-            <a:endParaRPr lang="cs-CZ" smtClean="0"/>
           </a:p>
         </p:txBody>
       </p:sp>
@@ -1918,7 +1848,9 @@
         <p:txBody>
           <a:bodyPr vert="horz" lIns="91440" tIns="45720" rIns="91440" bIns="45720" rtlCol="0" anchor="ctr"/>
           <a:lstStyle/>
-          <a:p/>
+          <a:p>
+            <a:endParaRPr/>
+          </a:p>
         </p:txBody>
       </p:sp>
       <p:sp>
@@ -1961,11 +1893,6 @@
               </a:rPr>
               <a:t>最后不讲大道理，给一个明天就能试的动作。</a:t>
             </a:r>
-            <a:endParaRPr lang="en-US" sz="1400" b="0" i="0" u="none" strike="noStrike">
-              <a:solidFill>
-                <a:srgbClr val="000000"/>
-              </a:solidFill>
-            </a:endParaRPr>
           </a:p>
           <a:p>
             <a:pPr marL="0" indent="0" algn="l">
@@ -1981,11 +1908,6 @@
               </a:rPr>
               <a:t>下次你用 AI 做完一个东西，别只把最终文件丢给同事。多做一步：把"我当时为什么这么判断、参考了哪几个资料、否掉了哪个方案"一起交出去。哪怕就是在文档开头写三行字。</a:t>
             </a:r>
-            <a:endParaRPr lang="en-US" sz="1400" b="0" i="0" u="none" strike="noStrike">
-              <a:solidFill>
-                <a:srgbClr val="000000"/>
-              </a:solidFill>
-            </a:endParaRPr>
           </a:p>
           <a:p>
             <a:pPr marL="0" indent="0" algn="l">
@@ -2001,11 +1923,6 @@
               </a:rPr>
               <a:t>这就是 TabTin 在工程上自动化的事——冻结上下文、带上引用材料。但不用等平台，今天手动就能开始。</a:t>
             </a:r>
-            <a:endParaRPr lang="en-US" sz="1400" b="0" i="0" u="none" strike="noStrike">
-              <a:solidFill>
-                <a:srgbClr val="000000"/>
-              </a:solidFill>
-            </a:endParaRPr>
           </a:p>
           <a:p>
             <a:pPr marL="0" indent="0" algn="l">
@@ -2021,11 +1938,6 @@
               </a:rPr>
               <a:t>多智能体也好，协作平台也好，核心就一句话：让工作能被下一个人接得住。</a:t>
             </a:r>
-            <a:endParaRPr lang="en-US" sz="1400" b="0" i="0" u="none" strike="noStrike">
-              <a:solidFill>
-                <a:srgbClr val="000000"/>
-              </a:solidFill>
-            </a:endParaRPr>
           </a:p>
         </p:txBody>
       </p:sp>
@@ -2055,7 +1967,9 @@
               <a:defRPr sz="1200"/>
             </a:lvl1pPr>
           </a:lstStyle>
-          <a:p/>
+          <a:p>
+            <a:endParaRPr/>
+          </a:p>
         </p:txBody>
       </p:sp>
       <p:sp>
@@ -2086,10 +2000,9 @@
           </a:lstStyle>
           <a:p>
             <a:r>
-              <a:rPr lang="cs-CZ" smtClean="0"/>
+              <a:rPr lang="cs-CZ"/>
               <a:t>‹#›</a:t>
             </a:r>
-            <a:endParaRPr lang="cs-CZ" smtClean="0"/>
           </a:p>
         </p:txBody>
       </p:sp>
@@ -2144,7 +2057,9 @@
               <a:defRPr sz="1200"/>
             </a:lvl1pPr>
           </a:lstStyle>
-          <a:p/>
+          <a:p>
+            <a:endParaRPr/>
+          </a:p>
         </p:txBody>
       </p:sp>
       <p:sp>
@@ -2175,10 +2090,9 @@
           </a:lstStyle>
           <a:p>
             <a:r>
-              <a:rPr lang="cs-CZ" smtClean="0"/>
+              <a:rPr lang="cs-CZ"/>
               <a:t>1.7.2013</a:t>
             </a:r>
-            <a:endParaRPr lang="cs-CZ" smtClean="0"/>
           </a:p>
         </p:txBody>
       </p:sp>
@@ -2210,7 +2124,9 @@
         <p:txBody>
           <a:bodyPr vert="horz" lIns="91440" tIns="45720" rIns="91440" bIns="45720" rtlCol="0" anchor="ctr"/>
           <a:lstStyle/>
-          <a:p/>
+          <a:p>
+            <a:endParaRPr/>
+          </a:p>
         </p:txBody>
       </p:sp>
       <p:sp>
@@ -2253,11 +2169,6 @@
               </a:rPr>
               <a:t>最后收一句。今天从生产率悖论聊到多智能体协同，再到 TabTin，核心就这一句：</a:t>
             </a:r>
-            <a:endParaRPr lang="en-US" sz="1400" b="0" i="0" u="none" strike="noStrike">
-              <a:solidFill>
-                <a:srgbClr val="000000"/>
-              </a:solidFill>
-            </a:endParaRPr>
           </a:p>
           <a:p>
             <a:pPr marL="0" indent="0" algn="l">
@@ -2273,11 +2184,6 @@
               </a:rPr>
               <a:t>AI 真正的效率红利，可能不在一个人用多快，而在一群人能不能互相接住。</a:t>
             </a:r>
-            <a:endParaRPr lang="en-US" sz="1400" b="0" i="0" u="none" strike="noStrike">
-              <a:solidFill>
-                <a:srgbClr val="000000"/>
-              </a:solidFill>
-            </a:endParaRPr>
           </a:p>
           <a:p>
             <a:pPr marL="0" indent="0" algn="l">
@@ -2293,11 +2199,6 @@
               </a:rPr>
               <a:t>TabTin 是 AGPL 的开源项目，现在 Public Preview，感兴趣的可以去 GitHub 跑一跑。我自己也是刚接触，有什么想法欢迎一起讨论，问答环节大家随便问。</a:t>
             </a:r>
-            <a:endParaRPr lang="en-US" sz="1400" b="0" i="0" u="none" strike="noStrike">
-              <a:solidFill>
-                <a:srgbClr val="000000"/>
-              </a:solidFill>
-            </a:endParaRPr>
           </a:p>
         </p:txBody>
       </p:sp>
@@ -2327,7 +2228,9 @@
               <a:defRPr sz="1200"/>
             </a:lvl1pPr>
           </a:lstStyle>
-          <a:p/>
+          <a:p>
+            <a:endParaRPr/>
+          </a:p>
         </p:txBody>
       </p:sp>
       <p:sp>
@@ -2358,10 +2261,9 @@
           </a:lstStyle>
           <a:p>
             <a:r>
-              <a:rPr lang="cs-CZ" smtClean="0"/>
+              <a:rPr lang="cs-CZ"/>
               <a:t>‹#›</a:t>
             </a:r>
-            <a:endParaRPr lang="cs-CZ" smtClean="0"/>
           </a:p>
         </p:txBody>
       </p:sp>
@@ -2416,7 +2318,9 @@
               <a:defRPr sz="1200"/>
             </a:lvl1pPr>
           </a:lstStyle>
-          <a:p/>
+          <a:p>
+            <a:endParaRPr/>
+          </a:p>
         </p:txBody>
       </p:sp>
       <p:sp>
@@ -2447,10 +2351,9 @@
           </a:lstStyle>
           <a:p>
             <a:r>
-              <a:rPr lang="cs-CZ" smtClean="0"/>
+              <a:rPr lang="cs-CZ"/>
               <a:t>1.7.2013</a:t>
             </a:r>
-            <a:endParaRPr lang="cs-CZ" smtClean="0"/>
           </a:p>
         </p:txBody>
       </p:sp>
@@ -2482,7 +2385,9 @@
         <p:txBody>
           <a:bodyPr vert="horz" lIns="91440" tIns="45720" rIns="91440" bIns="45720" rtlCol="0" anchor="ctr"/>
           <a:lstStyle/>
-          <a:p/>
+          <a:p>
+            <a:endParaRPr/>
+          </a:p>
         </p:txBody>
       </p:sp>
       <p:sp>
@@ -2525,11 +2430,6 @@
               </a:rPr>
               <a:t>先问大家一个问题：最近有没有遇到过这种场景——你让 AI 做了一下午的活，同事接手的时候要重新问你一遍结论怎么来的、数据从哪来的。</a:t>
             </a:r>
-            <a:endParaRPr lang="en-US" sz="1400" b="0" i="0" u="none" strike="noStrike">
-              <a:solidFill>
-                <a:srgbClr val="000000"/>
-              </a:solidFill>
-            </a:endParaRPr>
           </a:p>
           <a:p>
             <a:pPr marL="0" indent="0" algn="l">
@@ -2545,11 +2445,6 @@
               </a:rPr>
               <a:t>这不是某个人不上心，而是我们现在用的这些 AI 工具，它设计的时候就是围着"你这一个人"转的。</a:t>
             </a:r>
-            <a:endParaRPr lang="en-US" sz="1400" b="0" i="0" u="none" strike="noStrike">
-              <a:solidFill>
-                <a:srgbClr val="000000"/>
-              </a:solidFill>
-            </a:endParaRPr>
           </a:p>
           <a:p>
             <a:pPr marL="0" indent="0" algn="l">
@@ -2565,11 +2460,6 @@
               </a:rPr>
               <a:t>你做完了，上下文在你的对话框里，方法在你的 Prompt 里，判断依据在你的历史记录里。这些东西不会自动变成团队的资产。</a:t>
             </a:r>
-            <a:endParaRPr lang="en-US" sz="1400" b="0" i="0" u="none" strike="noStrike">
-              <a:solidFill>
-                <a:srgbClr val="000000"/>
-              </a:solidFill>
-            </a:endParaRPr>
           </a:p>
         </p:txBody>
       </p:sp>
@@ -2599,7 +2489,9 @@
               <a:defRPr sz="1200"/>
             </a:lvl1pPr>
           </a:lstStyle>
-          <a:p/>
+          <a:p>
+            <a:endParaRPr/>
+          </a:p>
         </p:txBody>
       </p:sp>
       <p:sp>
@@ -2630,10 +2522,9 @@
           </a:lstStyle>
           <a:p>
             <a:r>
-              <a:rPr lang="cs-CZ" smtClean="0"/>
+              <a:rPr lang="cs-CZ"/>
               <a:t>‹#›</a:t>
             </a:r>
-            <a:endParaRPr lang="cs-CZ" smtClean="0"/>
           </a:p>
         </p:txBody>
       </p:sp>
@@ -2688,7 +2579,9 @@
               <a:defRPr sz="1200"/>
             </a:lvl1pPr>
           </a:lstStyle>
-          <a:p/>
+          <a:p>
+            <a:endParaRPr/>
+          </a:p>
         </p:txBody>
       </p:sp>
       <p:sp>
@@ -2719,10 +2612,9 @@
           </a:lstStyle>
           <a:p>
             <a:r>
-              <a:rPr lang="cs-CZ" smtClean="0"/>
+              <a:rPr lang="cs-CZ"/>
               <a:t>1.7.2013</a:t>
             </a:r>
-            <a:endParaRPr lang="cs-CZ" smtClean="0"/>
           </a:p>
         </p:txBody>
       </p:sp>
@@ -2738,8 +2630,8 @@
         </p:nvSpPr>
         <p:spPr>
           <a:xfrm>
-            <a:off x="2857500" y="512763"/>
-            <a:ext cx="3429000" cy="2566987"/>
+            <a:off x="2290763" y="512763"/>
+            <a:ext cx="4562475" cy="2566987"/>
           </a:xfrm>
           <a:prstGeom prst="rect">
             <a:avLst/>
@@ -2754,7 +2646,9 @@
         <p:txBody>
           <a:bodyPr vert="horz" lIns="91440" tIns="45720" rIns="91440" bIns="45720" rtlCol="0" anchor="ctr"/>
           <a:lstStyle/>
-          <a:p/>
+          <a:p>
+            <a:endParaRPr/>
+          </a:p>
         </p:txBody>
       </p:sp>
       <p:sp>
@@ -2797,11 +2691,6 @@
               </a:rPr>
               <a:t>这个鸿沟不是我瞎编的。个人层面，受控实验里编码任务完成时间提升在 20% 到 55% 这个区间，体感上确实快了。当然也有严谨实验发现资深开发者在熟悉代码上反而慢了 19%，说明这个数字高度依赖任务类型。</a:t>
             </a:r>
-            <a:endParaRPr lang="en-US" sz="1400" b="0" i="0" u="none" strike="noStrike">
-              <a:solidFill>
-                <a:srgbClr val="000000"/>
-              </a:solidFill>
-            </a:endParaRPr>
           </a:p>
           <a:p>
             <a:pPr marL="0" indent="0" algn="l">
@@ -2817,11 +2706,6 @@
               </a:rPr>
               <a:t>但把视角拉到宏观，经济学家 Acemoglu 估算十年间 AI 对全要素生产率的贡献只有大约 0.5%——这是偏保守的估算，乐观模型到年均 0.7 个百分点。</a:t>
             </a:r>
-            <a:endParaRPr lang="en-US" sz="1400" b="0" i="0" u="none" strike="noStrike">
-              <a:solidFill>
-                <a:srgbClr val="000000"/>
-              </a:solidFill>
-            </a:endParaRPr>
           </a:p>
           <a:p>
             <a:pPr marL="0" indent="0" algn="l">
@@ -2837,11 +2721,6 @@
               </a:rPr>
               <a:t>经济学家管这个叫"生产率悖论"——索洛 1987 年就说过，到处都看得到计算机时代，唯独生产率统计里看不到。</a:t>
             </a:r>
-            <a:endParaRPr lang="en-US" sz="1400" b="0" i="0" u="none" strike="noStrike">
-              <a:solidFill>
-                <a:srgbClr val="000000"/>
-              </a:solidFill>
-            </a:endParaRPr>
           </a:p>
           <a:p>
             <a:pPr marL="0" indent="0" algn="l">
@@ -2857,11 +2736,6 @@
               </a:rPr>
               <a:t>中间的原因有很多，今天我们不展开经济学，只聚焦一个：信息从一个人传到另一个人时，在"汇报/交接"这一步被压成了有损摘要。</a:t>
             </a:r>
-            <a:endParaRPr lang="en-US" sz="1400" b="0" i="0" u="none" strike="noStrike">
-              <a:solidFill>
-                <a:srgbClr val="000000"/>
-              </a:solidFill>
-            </a:endParaRPr>
           </a:p>
         </p:txBody>
       </p:sp>
@@ -2891,7 +2765,9 @@
               <a:defRPr sz="1200"/>
             </a:lvl1pPr>
           </a:lstStyle>
-          <a:p/>
+          <a:p>
+            <a:endParaRPr/>
+          </a:p>
         </p:txBody>
       </p:sp>
       <p:sp>
@@ -2922,10 +2798,9 @@
           </a:lstStyle>
           <a:p>
             <a:r>
-              <a:rPr lang="cs-CZ" smtClean="0"/>
+              <a:rPr lang="cs-CZ"/>
               <a:t>‹#›</a:t>
             </a:r>
-            <a:endParaRPr lang="cs-CZ" smtClean="0"/>
           </a:p>
         </p:txBody>
       </p:sp>
@@ -2980,7 +2855,9 @@
               <a:defRPr sz="1200"/>
             </a:lvl1pPr>
           </a:lstStyle>
-          <a:p/>
+          <a:p>
+            <a:endParaRPr/>
+          </a:p>
         </p:txBody>
       </p:sp>
       <p:sp>
@@ -3011,10 +2888,9 @@
           </a:lstStyle>
           <a:p>
             <a:r>
-              <a:rPr lang="cs-CZ" smtClean="0"/>
+              <a:rPr lang="cs-CZ"/>
               <a:t>1.7.2013</a:t>
             </a:r>
-            <a:endParaRPr lang="cs-CZ" smtClean="0"/>
           </a:p>
         </p:txBody>
       </p:sp>
@@ -3046,7 +2922,9 @@
         <p:txBody>
           <a:bodyPr vert="horz" lIns="91440" tIns="45720" rIns="91440" bIns="45720" rtlCol="0" anchor="ctr"/>
           <a:lstStyle/>
-          <a:p/>
+          <a:p>
+            <a:endParaRPr/>
+          </a:p>
         </p:txBody>
       </p:sp>
       <p:sp>
@@ -3089,11 +2967,6 @@
               </a:rPr>
               <a:t>现在的 AI coding 工具——Codex、Claude Code——把"一个人怎么和 AI 干活"这条链打磨得很完整。</a:t>
             </a:r>
-            <a:endParaRPr lang="en-US" sz="1400" b="0" i="0" u="none" strike="noStrike">
-              <a:solidFill>
-                <a:srgbClr val="000000"/>
-              </a:solidFill>
-            </a:endParaRPr>
           </a:p>
           <a:p>
             <a:pPr marL="0" indent="0" algn="l">
@@ -3109,11 +2982,6 @@
               </a:rPr>
               <a:t>从最底下一次无状态的 API 请求，到 Agent 循环、记忆注入、沙箱审批、MCP 协议扩展、状态持久，最上面多任务编排，这七层全是围绕你这一个人的 session 跑的。</a:t>
             </a:r>
-            <a:endParaRPr lang="en-US" sz="1400" b="0" i="0" u="none" strike="noStrike">
-              <a:solidFill>
-                <a:srgbClr val="000000"/>
-              </a:solidFill>
-            </a:endParaRPr>
           </a:p>
           <a:p>
             <a:pPr marL="0" indent="0" algn="l">
@@ -3129,11 +2997,6 @@
               </a:rPr>
               <a:t>但你往右边看——多人协作、任务接续、上下文共享、方法复用、执行追溯——这一层，现在的工具基本是空白。这就是 TabTin 切入的位置，也是接下来多智能体协同这个话题要回应的问题。</a:t>
             </a:r>
-            <a:endParaRPr lang="en-US" sz="1400" b="0" i="0" u="none" strike="noStrike">
-              <a:solidFill>
-                <a:srgbClr val="000000"/>
-              </a:solidFill>
-            </a:endParaRPr>
           </a:p>
         </p:txBody>
       </p:sp>
@@ -3163,7 +3026,9 @@
               <a:defRPr sz="1200"/>
             </a:lvl1pPr>
           </a:lstStyle>
-          <a:p/>
+          <a:p>
+            <a:endParaRPr/>
+          </a:p>
         </p:txBody>
       </p:sp>
       <p:sp>
@@ -3194,10 +3059,9 @@
           </a:lstStyle>
           <a:p>
             <a:r>
-              <a:rPr lang="cs-CZ" smtClean="0"/>
+              <a:rPr lang="cs-CZ"/>
               <a:t>‹#›</a:t>
             </a:r>
-            <a:endParaRPr lang="cs-CZ" smtClean="0"/>
           </a:p>
         </p:txBody>
       </p:sp>
@@ -3252,7 +3116,9 @@
               <a:defRPr sz="1200"/>
             </a:lvl1pPr>
           </a:lstStyle>
-          <a:p/>
+          <a:p>
+            <a:endParaRPr/>
+          </a:p>
         </p:txBody>
       </p:sp>
       <p:sp>
@@ -3283,10 +3149,9 @@
           </a:lstStyle>
           <a:p>
             <a:r>
-              <a:rPr lang="cs-CZ" smtClean="0"/>
+              <a:rPr lang="cs-CZ"/>
               <a:t>1.7.2013</a:t>
             </a:r>
-            <a:endParaRPr lang="cs-CZ" smtClean="0"/>
           </a:p>
         </p:txBody>
       </p:sp>
@@ -3318,7 +3183,9 @@
         <p:txBody>
           <a:bodyPr vert="horz" lIns="91440" tIns="45720" rIns="91440" bIns="45720" rtlCol="0" anchor="ctr"/>
           <a:lstStyle/>
-          <a:p/>
+          <a:p>
+            <a:endParaRPr/>
+          </a:p>
         </p:txBody>
       </p:sp>
       <p:sp>
@@ -3361,11 +3228,6 @@
               </a:rPr>
               <a:t>面对右边那片空白，技术界很自然地想到一个方向：既然一个人调度 agent 能提效，那多来几个 agent 一起干是不是更快？</a:t>
             </a:r>
-            <a:endParaRPr lang="en-US" sz="1400" b="0" i="0" u="none" strike="noStrike">
-              <a:solidFill>
-                <a:srgbClr val="000000"/>
-              </a:solidFill>
-            </a:endParaRPr>
           </a:p>
           <a:p>
             <a:pPr marL="0" indent="0" algn="l">
@@ -3381,11 +3243,6 @@
               </a:rPr>
               <a:t>这就是最近很热的多智能体协同、Agent Teams 这类概念。</a:t>
             </a:r>
-            <a:endParaRPr lang="en-US" sz="1400" b="0" i="0" u="none" strike="noStrike">
-              <a:solidFill>
-                <a:srgbClr val="000000"/>
-              </a:solidFill>
-            </a:endParaRPr>
           </a:p>
           <a:p>
             <a:pPr marL="0" indent="0" algn="l">
@@ -3401,11 +3258,6 @@
               </a:rPr>
               <a:t>但我读下来发现，这件事比"多个 agent 互相发消息"复杂得多。我们接下来花几分钟把它讲透，因为这是理解后面 TabTin 为什么选那条路的钥匙。</a:t>
             </a:r>
-            <a:endParaRPr lang="en-US" sz="1400" b="0" i="0" u="none" strike="noStrike">
-              <a:solidFill>
-                <a:srgbClr val="000000"/>
-              </a:solidFill>
-            </a:endParaRPr>
           </a:p>
         </p:txBody>
       </p:sp>
@@ -3435,7 +3287,9 @@
               <a:defRPr sz="1200"/>
             </a:lvl1pPr>
           </a:lstStyle>
-          <a:p/>
+          <a:p>
+            <a:endParaRPr/>
+          </a:p>
         </p:txBody>
       </p:sp>
       <p:sp>
@@ -3466,10 +3320,9 @@
           </a:lstStyle>
           <a:p>
             <a:r>
-              <a:rPr lang="cs-CZ" smtClean="0"/>
+              <a:rPr lang="cs-CZ"/>
               <a:t>‹#›</a:t>
             </a:r>
-            <a:endParaRPr lang="cs-CZ" smtClean="0"/>
           </a:p>
         </p:txBody>
       </p:sp>
@@ -3524,7 +3377,9 @@
               <a:defRPr sz="1200"/>
             </a:lvl1pPr>
           </a:lstStyle>
-          <a:p/>
+          <a:p>
+            <a:endParaRPr/>
+          </a:p>
         </p:txBody>
       </p:sp>
       <p:sp>
@@ -3555,10 +3410,9 @@
           </a:lstStyle>
           <a:p>
             <a:r>
-              <a:rPr lang="cs-CZ" smtClean="0"/>
+              <a:rPr lang="cs-CZ"/>
               <a:t>1.7.2013</a:t>
             </a:r>
-            <a:endParaRPr lang="cs-CZ" smtClean="0"/>
           </a:p>
         </p:txBody>
       </p:sp>
@@ -3590,7 +3444,9 @@
         <p:txBody>
           <a:bodyPr vert="horz" lIns="91440" tIns="45720" rIns="91440" bIns="45720" rtlCol="0" anchor="ctr"/>
           <a:lstStyle/>
-          <a:p/>
+          <a:p>
+            <a:endParaRPr/>
+          </a:p>
         </p:txBody>
       </p:sp>
       <p:sp>
@@ -3633,11 +3489,6 @@
               </a:rPr>
               <a:t>左边是子代理：星型，主管派活下属汇报，下属之间不能说话。右边是多智能体协同：网状，队友之间可以直接对话。</a:t>
             </a:r>
-            <a:endParaRPr lang="en-US" sz="1400" b="0" i="0" u="none" strike="noStrike">
-              <a:solidFill>
-                <a:srgbClr val="000000"/>
-              </a:solidFill>
-            </a:endParaRPr>
           </a:p>
           <a:p>
             <a:pPr marL="0" indent="0" algn="l">
@@ -3653,11 +3504,6 @@
               </a:rPr>
               <a:t>最典型的例子——安全审查 agent 发现问题，中途直接喊正在做性能优化的 agent"别把这个写法用到别处"。子代理架构做不到，因为它们之间零通信。</a:t>
             </a:r>
-            <a:endParaRPr lang="en-US" sz="1400" b="0" i="0" u="none" strike="noStrike">
-              <a:solidFill>
-                <a:srgbClr val="000000"/>
-              </a:solidFill>
-            </a:endParaRPr>
           </a:p>
           <a:p>
             <a:pPr marL="0" indent="0" algn="l">
@@ -3673,11 +3519,6 @@
               </a:rPr>
               <a:t>现状：Codex 目前只做到左边；Claude Code 的 Agent Teams 想做右边，但还在研究预览阶段，工具链还在早期。</a:t>
             </a:r>
-            <a:endParaRPr lang="en-US" sz="1400" b="0" i="0" u="none" strike="noStrike">
-              <a:solidFill>
-                <a:srgbClr val="000000"/>
-              </a:solidFill>
-            </a:endParaRPr>
           </a:p>
         </p:txBody>
       </p:sp>
@@ -3707,7 +3548,9 @@
               <a:defRPr sz="1200"/>
             </a:lvl1pPr>
           </a:lstStyle>
-          <a:p/>
+          <a:p>
+            <a:endParaRPr/>
+          </a:p>
         </p:txBody>
       </p:sp>
       <p:sp>
@@ -3738,10 +3581,9 @@
           </a:lstStyle>
           <a:p>
             <a:r>
-              <a:rPr lang="cs-CZ" smtClean="0"/>
+              <a:rPr lang="cs-CZ"/>
               <a:t>‹#›</a:t>
             </a:r>
-            <a:endParaRPr lang="cs-CZ" smtClean="0"/>
           </a:p>
         </p:txBody>
       </p:sp>
@@ -3796,7 +3638,9 @@
               <a:defRPr sz="1200"/>
             </a:lvl1pPr>
           </a:lstStyle>
-          <a:p/>
+          <a:p>
+            <a:endParaRPr/>
+          </a:p>
         </p:txBody>
       </p:sp>
       <p:sp>
@@ -3827,10 +3671,9 @@
           </a:lstStyle>
           <a:p>
             <a:r>
-              <a:rPr lang="cs-CZ" smtClean="0"/>
+              <a:rPr lang="cs-CZ"/>
               <a:t>1.7.2013</a:t>
             </a:r>
-            <a:endParaRPr lang="cs-CZ" smtClean="0"/>
           </a:p>
         </p:txBody>
       </p:sp>
@@ -3862,7 +3705,9 @@
         <p:txBody>
           <a:bodyPr vert="horz" lIns="91440" tIns="45720" rIns="91440" bIns="45720" rtlCol="0" anchor="ctr"/>
           <a:lstStyle/>
-          <a:p/>
+          <a:p>
+            <a:endParaRPr/>
+          </a:p>
         </p:txBody>
       </p:sp>
       <p:sp>
@@ -3905,11 +3750,6 @@
               </a:rPr>
               <a:t>这一页是整个多智能体话题的核心。左边：A 子代理花十分钟读了二十个文件，回传给主线程的只有一句"建议方案 B"。但 B 子代理可能恰恰需要知道"A 当时为什么否掉了方案 A 里那个边界条件"——这个细节在 A 压缩成摘要时就被扔了。</a:t>
             </a:r>
-            <a:endParaRPr lang="en-US" sz="1400" b="0" i="0" u="none" strike="noStrike">
-              <a:solidFill>
-                <a:srgbClr val="000000"/>
-              </a:solidFill>
-            </a:endParaRPr>
           </a:p>
           <a:p>
             <a:pPr marL="0" indent="0" algn="l">
@@ -3925,11 +3765,6 @@
               </a:rPr>
               <a:t>右边：多智能体协同让发现问题的 agent 和需要这个信息的 agent 直接对话，信息只损耗一次。这其实就是我们 P2 说的"同事接不住你"的 agent 版本。</a:t>
             </a:r>
-            <a:endParaRPr lang="en-US" sz="1400" b="0" i="0" u="none" strike="noStrike">
-              <a:solidFill>
-                <a:srgbClr val="000000"/>
-              </a:solidFill>
-            </a:endParaRPr>
           </a:p>
           <a:p>
             <a:pPr marL="0" indent="0" algn="l">
@@ -3945,11 +3780,6 @@
               </a:rPr>
               <a:t>认知层面也是同一个道理：你自己检查自己的考卷，你会犯的错第二遍还会犯。多个独立视角互相挑错，收敛到同一答案才值得信。</a:t>
             </a:r>
-            <a:endParaRPr lang="en-US" sz="1400" b="0" i="0" u="none" strike="noStrike">
-              <a:solidFill>
-                <a:srgbClr val="000000"/>
-              </a:solidFill>
-            </a:endParaRPr>
           </a:p>
         </p:txBody>
       </p:sp>
@@ -3979,7 +3809,9 @@
               <a:defRPr sz="1200"/>
             </a:lvl1pPr>
           </a:lstStyle>
-          <a:p/>
+          <a:p>
+            <a:endParaRPr/>
+          </a:p>
         </p:txBody>
       </p:sp>
       <p:sp>
@@ -4010,10 +3842,9 @@
           </a:lstStyle>
           <a:p>
             <a:r>
-              <a:rPr lang="cs-CZ" smtClean="0"/>
+              <a:rPr lang="cs-CZ"/>
               <a:t>‹#›</a:t>
             </a:r>
-            <a:endParaRPr lang="cs-CZ" smtClean="0"/>
           </a:p>
         </p:txBody>
       </p:sp>
@@ -4068,7 +3899,9 @@
               <a:defRPr sz="1200"/>
             </a:lvl1pPr>
           </a:lstStyle>
-          <a:p/>
+          <a:p>
+            <a:endParaRPr/>
+          </a:p>
         </p:txBody>
       </p:sp>
       <p:sp>
@@ -4099,10 +3932,9 @@
           </a:lstStyle>
           <a:p>
             <a:r>
-              <a:rPr lang="cs-CZ" smtClean="0"/>
+              <a:rPr lang="cs-CZ"/>
               <a:t>1.7.2013</a:t>
             </a:r>
-            <a:endParaRPr lang="cs-CZ" smtClean="0"/>
           </a:p>
         </p:txBody>
       </p:sp>
@@ -4134,7 +3966,9 @@
         <p:txBody>
           <a:bodyPr vert="horz" lIns="91440" tIns="45720" rIns="91440" bIns="45720" rtlCol="0" anchor="ctr"/>
           <a:lstStyle/>
-          <a:p/>
+          <a:p>
+            <a:endParaRPr/>
+          </a:p>
         </p:txBody>
       </p:sp>
       <p:sp>
@@ -4177,11 +4011,6 @@
               </a:rPr>
               <a:t>讲到这里必须泼两盆冷水，不然就变成无脑吹多智能体了。</a:t>
             </a:r>
-            <a:endParaRPr lang="en-US" sz="1400" b="0" i="0" u="none" strike="noStrike">
-              <a:solidFill>
-                <a:srgbClr val="000000"/>
-              </a:solidFill>
-            </a:endParaRPr>
           </a:p>
           <a:p>
             <a:pPr marL="0" indent="0" algn="l">
@@ -4197,11 +4026,6 @@
               </a:rPr>
               <a:t>第一盆：多 agent 辩论大约消耗 2 到 5 倍 token。原论文没做"给单 agent 同样多 token"的对照。后来有人补上了，结果发现单 agent 拿同样多的 token 自己深想，不一定差。所以多 agent 买的不是算力，是真正的独立视角。</a:t>
             </a:r>
-            <a:endParaRPr lang="en-US" sz="1400" b="0" i="0" u="none" strike="noStrike">
-              <a:solidFill>
-                <a:srgbClr val="000000"/>
-              </a:solidFill>
-            </a:endParaRPr>
           </a:p>
           <a:p>
             <a:pPr marL="0" indent="0" algn="l">
@@ -4217,11 +4041,6 @@
               </a:rPr>
               <a:t>第二盆更扎心：2026 年一项针对 7 到 8B 参数模型的研究发现，同质小组辩论不仅没有提升准确性，反而比独立自校正多花了 2 到 3.4 倍 token——因为 sycophantic conformity，就是大家一起掉到同一个沟里，还因为"别人也这么说"更自信了。共享同一套训练分布，就共享同一类盲点。</a:t>
             </a:r>
-            <a:endParaRPr lang="en-US" sz="1400" b="0" i="0" u="none" strike="noStrike">
-              <a:solidFill>
-                <a:srgbClr val="000000"/>
-              </a:solidFill>
-            </a:endParaRPr>
           </a:p>
           <a:p>
             <a:pPr marL="0" indent="0" algn="l">
@@ -4237,11 +4056,6 @@
               </a:rPr>
               <a:t>所以那句话记住：同一个模型开三个实例互相点头，那不叫多智能体，叫一场自我肯定的表演。</a:t>
             </a:r>
-            <a:endParaRPr lang="en-US" sz="1400" b="0" i="0" u="none" strike="noStrike">
-              <a:solidFill>
-                <a:srgbClr val="000000"/>
-              </a:solidFill>
-            </a:endParaRPr>
           </a:p>
         </p:txBody>
       </p:sp>
@@ -4271,7 +4085,9 @@
               <a:defRPr sz="1200"/>
             </a:lvl1pPr>
           </a:lstStyle>
-          <a:p/>
+          <a:p>
+            <a:endParaRPr/>
+          </a:p>
         </p:txBody>
       </p:sp>
       <p:sp>
@@ -4302,10 +4118,9 @@
           </a:lstStyle>
           <a:p>
             <a:r>
-              <a:rPr lang="cs-CZ" smtClean="0"/>
+              <a:rPr lang="cs-CZ"/>
               <a:t>‹#›</a:t>
             </a:r>
-            <a:endParaRPr lang="cs-CZ" smtClean="0"/>
           </a:p>
         </p:txBody>
       </p:sp>
@@ -4360,7 +4175,9 @@
               <a:defRPr sz="1200"/>
             </a:lvl1pPr>
           </a:lstStyle>
-          <a:p/>
+          <a:p>
+            <a:endParaRPr/>
+          </a:p>
         </p:txBody>
       </p:sp>
       <p:sp>
@@ -4391,10 +4208,9 @@
           </a:lstStyle>
           <a:p>
             <a:r>
-              <a:rPr lang="cs-CZ" smtClean="0"/>
+              <a:rPr lang="cs-CZ"/>
               <a:t>1.7.2013</a:t>
             </a:r>
-            <a:endParaRPr lang="cs-CZ" smtClean="0"/>
           </a:p>
         </p:txBody>
       </p:sp>
@@ -4426,7 +4242,9 @@
         <p:txBody>
           <a:bodyPr vert="horz" lIns="91440" tIns="45720" rIns="91440" bIns="45720" rtlCol="0" anchor="ctr"/>
           <a:lstStyle/>
-          <a:p/>
+          <a:p>
+            <a:endParaRPr/>
+          </a:p>
         </p:txBody>
       </p:sp>
       <p:sp>
@@ -4469,11 +4287,6 @@
               </a:rPr>
               <a:t>讲完多智能体协同的坑，现在来看 TabTin。它是个开源的人机协作平台，AGPL。</a:t>
             </a:r>
-            <a:endParaRPr lang="en-US" sz="1400" b="0" i="0" u="none" strike="noStrike">
-              <a:solidFill>
-                <a:srgbClr val="000000"/>
-              </a:solidFill>
-            </a:endParaRPr>
           </a:p>
           <a:p>
             <a:pPr marL="0" indent="0" algn="l">
@@ -4489,11 +4302,6 @@
               </a:rPr>
               <a:t>它最有意思的不是做了什么，而是没做什么——它没有急着让 agent 之间互相聊天，而是先解决"人接续人的工作"。</a:t>
             </a:r>
-            <a:endParaRPr lang="en-US" sz="1400" b="0" i="0" u="none" strike="noStrike">
-              <a:solidFill>
-                <a:srgbClr val="000000"/>
-              </a:solidFill>
-            </a:endParaRPr>
           </a:p>
           <a:p>
             <a:pPr marL="0" indent="0" algn="l">
@@ -4509,11 +4317,6 @@
               </a:rPr>
               <a:t>四个机制：交接任务时冻结完整上下文带上引用文档；人和 agent 在同一份在线文档表格 PPT 上操作；方法固化成可复用的 agent 角色；执行记录可追溯，判断仍然由人做。</a:t>
             </a:r>
-            <a:endParaRPr lang="en-US" sz="1400" b="0" i="0" u="none" strike="noStrike">
-              <a:solidFill>
-                <a:srgbClr val="000000"/>
-              </a:solidFill>
-            </a:endParaRPr>
           </a:p>
           <a:p>
             <a:pPr marL="0" indent="0" algn="l">
@@ -4529,11 +4332,6 @@
               </a:rPr>
               <a:t>你会发现，它选的这条路，正好是上一页那条冷水的回响——没有真正异质性的协同，不如不做。它先把人之间的接续做扎实。</a:t>
             </a:r>
-            <a:endParaRPr lang="en-US" sz="1400" b="0" i="0" u="none" strike="noStrike">
-              <a:solidFill>
-                <a:srgbClr val="000000"/>
-              </a:solidFill>
-            </a:endParaRPr>
           </a:p>
         </p:txBody>
       </p:sp>
@@ -4563,7 +4361,9 @@
               <a:defRPr sz="1200"/>
             </a:lvl1pPr>
           </a:lstStyle>
-          <a:p/>
+          <a:p>
+            <a:endParaRPr/>
+          </a:p>
         </p:txBody>
       </p:sp>
       <p:sp>
@@ -4594,10 +4394,9 @@
           </a:lstStyle>
           <a:p>
             <a:r>
-              <a:rPr lang="cs-CZ" smtClean="0"/>
+              <a:rPr lang="cs-CZ"/>
               <a:t>‹#›</a:t>
             </a:r>
-            <a:endParaRPr lang="cs-CZ" smtClean="0"/>
           </a:p>
         </p:txBody>
       </p:sp>
@@ -4610,11 +4409,11 @@
 </file>
 
 <file path=ppt/slideLayouts/slideLayout1.xml><?xml version="1.0" encoding="utf-8"?>
-<p:sldLayout xmlns:a="http://schemas.openxmlformats.org/drawingml/2006/main" xmlns:r="http://schemas.openxmlformats.org/officeDocument/2006/relationships" xmlns:p="http://schemas.openxmlformats.org/presentationml/2006/main" type="title" matchingName="标题幻灯片">
+<p:sldLayout xmlns:a="http://schemas.openxmlformats.org/drawingml/2006/main" xmlns:r="http://schemas.openxmlformats.org/officeDocument/2006/relationships" xmlns:p="http://schemas.openxmlformats.org/presentationml/2006/main" matchingName="标题幻灯片" type="title">
   <p:cSld name="TITLE">
     <p:spTree>
       <p:nvGrpSpPr>
-        <p:cNvPr id="11" name="Shape 11"/>
+        <p:cNvPr id="1" name="Shape 11"/>
         <p:cNvGrpSpPr/>
         <p:nvPr/>
       </p:nvGrpSpPr>
@@ -4629,7 +4428,9 @@
       <p:sp>
         <p:nvSpPr>
           <p:cNvPr id="12" name="Shape 30"/>
-          <p:cNvSpPr txBox="1"/>
+          <p:cNvSpPr txBox="1">
+            <a:spLocks noGrp="1"/>
+          </p:cNvSpPr>
           <p:nvPr>
             <p:ph type="ctrTitle"/>
           </p:nvPr>
@@ -4759,13 +4560,17 @@
               <a:defRPr/>
             </a:lvl9pPr>
           </a:lstStyle>
-          <a:p/>
+          <a:p>
+            <a:endParaRPr/>
+          </a:p>
         </p:txBody>
       </p:sp>
       <p:sp>
         <p:nvSpPr>
           <p:cNvPr id="13" name="Shape 31"/>
-          <p:cNvSpPr txBox="1"/>
+          <p:cNvSpPr txBox="1">
+            <a:spLocks noGrp="1"/>
+          </p:cNvSpPr>
           <p:nvPr>
             <p:ph type="subTitle" idx="1"/>
           </p:nvPr>
@@ -4942,13 +4747,17 @@
               <a:defRPr sz="1200"/>
             </a:lvl9pPr>
           </a:lstStyle>
-          <a:p/>
+          <a:p>
+            <a:endParaRPr/>
+          </a:p>
         </p:txBody>
       </p:sp>
       <p:sp>
         <p:nvSpPr>
           <p:cNvPr id="14" name="Shape 32"/>
-          <p:cNvSpPr txBox="1"/>
+          <p:cNvSpPr txBox="1">
+            <a:spLocks noGrp="1"/>
+          </p:cNvSpPr>
           <p:nvPr>
             <p:ph type="dt" idx="10"/>
           </p:nvPr>
@@ -5071,13 +4880,17 @@
               <a:defRPr/>
             </a:lvl9pPr>
           </a:lstStyle>
-          <a:p/>
+          <a:p>
+            <a:endParaRPr/>
+          </a:p>
         </p:txBody>
       </p:sp>
       <p:sp>
         <p:nvSpPr>
           <p:cNvPr id="15" name="Shape 33"/>
-          <p:cNvSpPr txBox="1"/>
+          <p:cNvSpPr txBox="1">
+            <a:spLocks noGrp="1"/>
+          </p:cNvSpPr>
           <p:nvPr>
             <p:ph type="ftr" idx="11"/>
           </p:nvPr>
@@ -5200,13 +5013,17 @@
               <a:defRPr/>
             </a:lvl9pPr>
           </a:lstStyle>
-          <a:p/>
+          <a:p>
+            <a:endParaRPr/>
+          </a:p>
         </p:txBody>
       </p:sp>
       <p:sp>
         <p:nvSpPr>
           <p:cNvPr id="16" name="Shape 34"/>
-          <p:cNvSpPr txBox="1"/>
+          <p:cNvSpPr txBox="1">
+            <a:spLocks noGrp="1"/>
+          </p:cNvSpPr>
           <p:nvPr>
             <p:ph type="sldNum" idx="12"/>
           </p:nvPr>
@@ -5304,7 +5121,8 @@
               <a:buNone/>
             </a:pPr>
             <a:fld id="{00000000-1234-1234-1234-123412341234}" type="slidenum">
-              <a:rPr lang="zh-CN"/>
+              <a:rPr lang="en-US" altLang="zh-CN"/>
+              <a:t>‹#›</a:t>
             </a:fld>
             <a:endParaRPr lang="zh-CN"/>
           </a:p>
@@ -5319,11 +5137,11 @@
 </file>
 
 <file path=ppt/slideLayouts/slideLayout10.xml><?xml version="1.0" encoding="utf-8"?>
-<p:sldLayout xmlns:a="http://schemas.openxmlformats.org/drawingml/2006/main" xmlns:r="http://schemas.openxmlformats.org/officeDocument/2006/relationships" xmlns:p="http://schemas.openxmlformats.org/presentationml/2006/main" type="vertTx" matchingName="标题和竖排文字">
+<p:sldLayout xmlns:a="http://schemas.openxmlformats.org/drawingml/2006/main" xmlns:r="http://schemas.openxmlformats.org/officeDocument/2006/relationships" xmlns:p="http://schemas.openxmlformats.org/presentationml/2006/main" matchingName="标题和竖排文字" type="vertTx">
   <p:cSld name="VERTICAL_TEXT">
     <p:spTree>
       <p:nvGrpSpPr>
-        <p:cNvPr id="68" name="Shape 68"/>
+        <p:cNvPr id="1" name="Shape 68"/>
         <p:cNvGrpSpPr/>
         <p:nvPr/>
       </p:nvGrpSpPr>
@@ -5338,7 +5156,9 @@
       <p:sp>
         <p:nvSpPr>
           <p:cNvPr id="69" name="Shape 49"/>
-          <p:cNvSpPr txBox="1"/>
+          <p:cNvSpPr txBox="1">
+            <a:spLocks noGrp="1"/>
+          </p:cNvSpPr>
           <p:nvPr>
             <p:ph type="title"/>
           </p:nvPr>
@@ -5467,13 +5287,17 @@
               <a:defRPr/>
             </a:lvl9pPr>
           </a:lstStyle>
-          <a:p/>
+          <a:p>
+            <a:endParaRPr/>
+          </a:p>
         </p:txBody>
       </p:sp>
       <p:sp>
         <p:nvSpPr>
           <p:cNvPr id="70" name="Shape 50"/>
-          <p:cNvSpPr txBox="1"/>
+          <p:cNvSpPr txBox="1">
+            <a:spLocks noGrp="1"/>
+          </p:cNvSpPr>
           <p:nvPr>
             <p:ph type="body" idx="1"/>
           </p:nvPr>
@@ -5650,13 +5474,17 @@
               <a:defRPr/>
             </a:lvl9pPr>
           </a:lstStyle>
-          <a:p/>
+          <a:p>
+            <a:endParaRPr/>
+          </a:p>
         </p:txBody>
       </p:sp>
       <p:sp>
         <p:nvSpPr>
           <p:cNvPr id="71" name="Shape 51"/>
-          <p:cNvSpPr txBox="1"/>
+          <p:cNvSpPr txBox="1">
+            <a:spLocks noGrp="1"/>
+          </p:cNvSpPr>
           <p:nvPr>
             <p:ph type="dt" idx="10"/>
           </p:nvPr>
@@ -5779,13 +5607,17 @@
               <a:defRPr/>
             </a:lvl9pPr>
           </a:lstStyle>
-          <a:p/>
+          <a:p>
+            <a:endParaRPr/>
+          </a:p>
         </p:txBody>
       </p:sp>
       <p:sp>
         <p:nvSpPr>
           <p:cNvPr id="72" name="Shape 52"/>
-          <p:cNvSpPr txBox="1"/>
+          <p:cNvSpPr txBox="1">
+            <a:spLocks noGrp="1"/>
+          </p:cNvSpPr>
           <p:nvPr>
             <p:ph type="ftr" idx="11"/>
           </p:nvPr>
@@ -5908,13 +5740,17 @@
               <a:defRPr/>
             </a:lvl9pPr>
           </a:lstStyle>
-          <a:p/>
+          <a:p>
+            <a:endParaRPr/>
+          </a:p>
         </p:txBody>
       </p:sp>
       <p:sp>
         <p:nvSpPr>
           <p:cNvPr id="73" name="Shape 53"/>
-          <p:cNvSpPr txBox="1"/>
+          <p:cNvSpPr txBox="1">
+            <a:spLocks noGrp="1"/>
+          </p:cNvSpPr>
           <p:nvPr>
             <p:ph type="sldNum" idx="12"/>
           </p:nvPr>
@@ -6012,7 +5848,8 @@
               <a:buNone/>
             </a:pPr>
             <a:fld id="{00000000-1234-1234-1234-123412341234}" type="slidenum">
-              <a:rPr lang="zh-CN"/>
+              <a:rPr lang="en-US" altLang="zh-CN"/>
+              <a:t>‹#›</a:t>
             </a:fld>
             <a:endParaRPr lang="zh-CN"/>
           </a:p>
@@ -6027,11 +5864,11 @@
 </file>
 
 <file path=ppt/slideLayouts/slideLayout11.xml><?xml version="1.0" encoding="utf-8"?>
-<p:sldLayout xmlns:a="http://schemas.openxmlformats.org/drawingml/2006/main" xmlns:r="http://schemas.openxmlformats.org/officeDocument/2006/relationships" xmlns:p="http://schemas.openxmlformats.org/presentationml/2006/main" type="vertTitleAndTx" matchingName="竖排标题与文本">
+<p:sldLayout xmlns:a="http://schemas.openxmlformats.org/drawingml/2006/main" xmlns:r="http://schemas.openxmlformats.org/officeDocument/2006/relationships" xmlns:p="http://schemas.openxmlformats.org/presentationml/2006/main" matchingName="竖排标题与文本" type="vertTitleAndTx">
   <p:cSld name="VERTICAL_TITLE_AND_VERTICAL_TEXT">
     <p:spTree>
       <p:nvGrpSpPr>
-        <p:cNvPr id="74" name="Shape 74"/>
+        <p:cNvPr id="1" name="Shape 74"/>
         <p:cNvGrpSpPr/>
         <p:nvPr/>
       </p:nvGrpSpPr>
@@ -6046,7 +5883,9 @@
       <p:sp>
         <p:nvSpPr>
           <p:cNvPr id="75" name="Shape 15"/>
-          <p:cNvSpPr txBox="1"/>
+          <p:cNvSpPr txBox="1">
+            <a:spLocks noGrp="1"/>
+          </p:cNvSpPr>
           <p:nvPr>
             <p:ph type="title"/>
           </p:nvPr>
@@ -6175,13 +6014,17 @@
               <a:defRPr/>
             </a:lvl9pPr>
           </a:lstStyle>
-          <a:p/>
+          <a:p>
+            <a:endParaRPr/>
+          </a:p>
         </p:txBody>
       </p:sp>
       <p:sp>
         <p:nvSpPr>
           <p:cNvPr id="76" name="Shape 16"/>
-          <p:cNvSpPr txBox="1"/>
+          <p:cNvSpPr txBox="1">
+            <a:spLocks noGrp="1"/>
+          </p:cNvSpPr>
           <p:nvPr>
             <p:ph type="body" idx="1"/>
           </p:nvPr>
@@ -6358,13 +6201,17 @@
               <a:defRPr/>
             </a:lvl9pPr>
           </a:lstStyle>
-          <a:p/>
+          <a:p>
+            <a:endParaRPr/>
+          </a:p>
         </p:txBody>
       </p:sp>
       <p:sp>
         <p:nvSpPr>
           <p:cNvPr id="77" name="Shape 17"/>
-          <p:cNvSpPr txBox="1"/>
+          <p:cNvSpPr txBox="1">
+            <a:spLocks noGrp="1"/>
+          </p:cNvSpPr>
           <p:nvPr>
             <p:ph type="dt" idx="10"/>
           </p:nvPr>
@@ -6487,13 +6334,17 @@
               <a:defRPr/>
             </a:lvl9pPr>
           </a:lstStyle>
-          <a:p/>
+          <a:p>
+            <a:endParaRPr/>
+          </a:p>
         </p:txBody>
       </p:sp>
       <p:sp>
         <p:nvSpPr>
           <p:cNvPr id="78" name="Shape 18"/>
-          <p:cNvSpPr txBox="1"/>
+          <p:cNvSpPr txBox="1">
+            <a:spLocks noGrp="1"/>
+          </p:cNvSpPr>
           <p:nvPr>
             <p:ph type="ftr" idx="11"/>
           </p:nvPr>
@@ -6616,13 +6467,17 @@
               <a:defRPr/>
             </a:lvl9pPr>
           </a:lstStyle>
-          <a:p/>
+          <a:p>
+            <a:endParaRPr/>
+          </a:p>
         </p:txBody>
       </p:sp>
       <p:sp>
         <p:nvSpPr>
           <p:cNvPr id="79" name="Shape 19"/>
-          <p:cNvSpPr txBox="1"/>
+          <p:cNvSpPr txBox="1">
+            <a:spLocks noGrp="1"/>
+          </p:cNvSpPr>
           <p:nvPr>
             <p:ph type="sldNum" idx="12"/>
           </p:nvPr>
@@ -6720,7 +6575,8 @@
               <a:buNone/>
             </a:pPr>
             <a:fld id="{00000000-1234-1234-1234-123412341234}" type="slidenum">
-              <a:rPr lang="zh-CN"/>
+              <a:rPr lang="en-US" altLang="zh-CN"/>
+              <a:t>‹#›</a:t>
             </a:fld>
             <a:endParaRPr lang="zh-CN"/>
           </a:p>
@@ -6760,11 +6616,11 @@
 </file>
 
 <file path=ppt/slideLayouts/slideLayout2.xml><?xml version="1.0" encoding="utf-8"?>
-<p:sldLayout xmlns:a="http://schemas.openxmlformats.org/drawingml/2006/main" xmlns:r="http://schemas.openxmlformats.org/officeDocument/2006/relationships" xmlns:p="http://schemas.openxmlformats.org/presentationml/2006/main" type="obj" matchingName="标题和内容">
+<p:sldLayout xmlns:a="http://schemas.openxmlformats.org/drawingml/2006/main" xmlns:r="http://schemas.openxmlformats.org/officeDocument/2006/relationships" xmlns:p="http://schemas.openxmlformats.org/presentationml/2006/main" matchingName="标题和内容" type="obj">
   <p:cSld name="OBJECT">
     <p:spTree>
       <p:nvGrpSpPr>
-        <p:cNvPr id="17" name="Shape 17"/>
+        <p:cNvPr id="1" name="Shape 17"/>
         <p:cNvGrpSpPr/>
         <p:nvPr/>
       </p:nvGrpSpPr>
@@ -6779,7 +6635,9 @@
       <p:sp>
         <p:nvSpPr>
           <p:cNvPr id="18" name="Shape 54"/>
-          <p:cNvSpPr txBox="1"/>
+          <p:cNvSpPr txBox="1">
+            <a:spLocks noGrp="1"/>
+          </p:cNvSpPr>
           <p:nvPr>
             <p:ph type="title"/>
           </p:nvPr>
@@ -6908,13 +6766,17 @@
               <a:defRPr/>
             </a:lvl9pPr>
           </a:lstStyle>
-          <a:p/>
+          <a:p>
+            <a:endParaRPr/>
+          </a:p>
         </p:txBody>
       </p:sp>
       <p:sp>
         <p:nvSpPr>
           <p:cNvPr id="19" name="Shape 55"/>
-          <p:cNvSpPr txBox="1"/>
+          <p:cNvSpPr txBox="1">
+            <a:spLocks noGrp="1"/>
+          </p:cNvSpPr>
           <p:nvPr>
             <p:ph type="body" idx="1"/>
           </p:nvPr>
@@ -7091,13 +6953,17 @@
               <a:defRPr/>
             </a:lvl9pPr>
           </a:lstStyle>
-          <a:p/>
+          <a:p>
+            <a:endParaRPr/>
+          </a:p>
         </p:txBody>
       </p:sp>
       <p:sp>
         <p:nvSpPr>
           <p:cNvPr id="20" name="Shape 56"/>
-          <p:cNvSpPr txBox="1"/>
+          <p:cNvSpPr txBox="1">
+            <a:spLocks noGrp="1"/>
+          </p:cNvSpPr>
           <p:nvPr>
             <p:ph type="dt" idx="10"/>
           </p:nvPr>
@@ -7220,13 +7086,17 @@
               <a:defRPr/>
             </a:lvl9pPr>
           </a:lstStyle>
-          <a:p/>
+          <a:p>
+            <a:endParaRPr/>
+          </a:p>
         </p:txBody>
       </p:sp>
       <p:sp>
         <p:nvSpPr>
           <p:cNvPr id="21" name="Shape 57"/>
-          <p:cNvSpPr txBox="1"/>
+          <p:cNvSpPr txBox="1">
+            <a:spLocks noGrp="1"/>
+          </p:cNvSpPr>
           <p:nvPr>
             <p:ph type="ftr" idx="11"/>
           </p:nvPr>
@@ -7349,13 +7219,17 @@
               <a:defRPr/>
             </a:lvl9pPr>
           </a:lstStyle>
-          <a:p/>
+          <a:p>
+            <a:endParaRPr/>
+          </a:p>
         </p:txBody>
       </p:sp>
       <p:sp>
         <p:nvSpPr>
           <p:cNvPr id="22" name="Shape 58"/>
-          <p:cNvSpPr txBox="1"/>
+          <p:cNvSpPr txBox="1">
+            <a:spLocks noGrp="1"/>
+          </p:cNvSpPr>
           <p:nvPr>
             <p:ph type="sldNum" idx="12"/>
           </p:nvPr>
@@ -7453,7 +7327,8 @@
               <a:buNone/>
             </a:pPr>
             <a:fld id="{00000000-1234-1234-1234-123412341234}" type="slidenum">
-              <a:rPr lang="zh-CN"/>
+              <a:rPr lang="en-US" altLang="zh-CN"/>
+              <a:t>‹#›</a:t>
             </a:fld>
             <a:endParaRPr lang="zh-CN"/>
           </a:p>
@@ -7468,11 +7343,11 @@
 </file>
 
 <file path=ppt/slideLayouts/slideLayout3.xml><?xml version="1.0" encoding="utf-8"?>
-<p:sldLayout xmlns:a="http://schemas.openxmlformats.org/drawingml/2006/main" xmlns:r="http://schemas.openxmlformats.org/officeDocument/2006/relationships" xmlns:p="http://schemas.openxmlformats.org/presentationml/2006/main" type="secHead" matchingName="节标题">
+<p:sldLayout xmlns:a="http://schemas.openxmlformats.org/drawingml/2006/main" xmlns:r="http://schemas.openxmlformats.org/officeDocument/2006/relationships" xmlns:p="http://schemas.openxmlformats.org/presentationml/2006/main" matchingName="节标题" type="secHead">
   <p:cSld name="SECTION_HEADER">
     <p:spTree>
       <p:nvGrpSpPr>
-        <p:cNvPr id="23" name="Shape 23"/>
+        <p:cNvPr id="1" name="Shape 23"/>
         <p:cNvGrpSpPr/>
         <p:nvPr/>
       </p:nvGrpSpPr>
@@ -7487,7 +7362,9 @@
       <p:sp>
         <p:nvSpPr>
           <p:cNvPr id="24" name="Shape 59"/>
-          <p:cNvSpPr txBox="1"/>
+          <p:cNvSpPr txBox="1">
+            <a:spLocks noGrp="1"/>
+          </p:cNvSpPr>
           <p:nvPr>
             <p:ph type="title"/>
           </p:nvPr>
@@ -7617,13 +7494,17 @@
               <a:defRPr/>
             </a:lvl9pPr>
           </a:lstStyle>
-          <a:p/>
+          <a:p>
+            <a:endParaRPr/>
+          </a:p>
         </p:txBody>
       </p:sp>
       <p:sp>
         <p:nvSpPr>
           <p:cNvPr id="25" name="Shape 60"/>
-          <p:cNvSpPr txBox="1"/>
+          <p:cNvSpPr txBox="1">
+            <a:spLocks noGrp="1"/>
+          </p:cNvSpPr>
           <p:nvPr>
             <p:ph type="body" idx="1"/>
           </p:nvPr>
@@ -7836,13 +7717,17 @@
               </a:defRPr>
             </a:lvl9pPr>
           </a:lstStyle>
-          <a:p/>
+          <a:p>
+            <a:endParaRPr/>
+          </a:p>
         </p:txBody>
       </p:sp>
       <p:sp>
         <p:nvSpPr>
           <p:cNvPr id="26" name="Shape 61"/>
-          <p:cNvSpPr txBox="1"/>
+          <p:cNvSpPr txBox="1">
+            <a:spLocks noGrp="1"/>
+          </p:cNvSpPr>
           <p:nvPr>
             <p:ph type="dt" idx="10"/>
           </p:nvPr>
@@ -7965,13 +7850,17 @@
               <a:defRPr/>
             </a:lvl9pPr>
           </a:lstStyle>
-          <a:p/>
+          <a:p>
+            <a:endParaRPr/>
+          </a:p>
         </p:txBody>
       </p:sp>
       <p:sp>
         <p:nvSpPr>
           <p:cNvPr id="27" name="Shape 62"/>
-          <p:cNvSpPr txBox="1"/>
+          <p:cNvSpPr txBox="1">
+            <a:spLocks noGrp="1"/>
+          </p:cNvSpPr>
           <p:nvPr>
             <p:ph type="ftr" idx="11"/>
           </p:nvPr>
@@ -8094,13 +7983,17 @@
               <a:defRPr/>
             </a:lvl9pPr>
           </a:lstStyle>
-          <a:p/>
+          <a:p>
+            <a:endParaRPr/>
+          </a:p>
         </p:txBody>
       </p:sp>
       <p:sp>
         <p:nvSpPr>
           <p:cNvPr id="28" name="Shape 63"/>
-          <p:cNvSpPr txBox="1"/>
+          <p:cNvSpPr txBox="1">
+            <a:spLocks noGrp="1"/>
+          </p:cNvSpPr>
           <p:nvPr>
             <p:ph type="sldNum" idx="12"/>
           </p:nvPr>
@@ -8198,7 +8091,8 @@
               <a:buNone/>
             </a:pPr>
             <a:fld id="{00000000-1234-1234-1234-123412341234}" type="slidenum">
-              <a:rPr lang="zh-CN"/>
+              <a:rPr lang="en-US" altLang="zh-CN"/>
+              <a:t>‹#›</a:t>
             </a:fld>
             <a:endParaRPr lang="zh-CN"/>
           </a:p>
@@ -8213,11 +8107,11 @@
 </file>
 
 <file path=ppt/slideLayouts/slideLayout4.xml><?xml version="1.0" encoding="utf-8"?>
-<p:sldLayout xmlns:a="http://schemas.openxmlformats.org/drawingml/2006/main" xmlns:r="http://schemas.openxmlformats.org/officeDocument/2006/relationships" xmlns:p="http://schemas.openxmlformats.org/presentationml/2006/main" type="twoObj" matchingName="两栏内容">
+<p:sldLayout xmlns:a="http://schemas.openxmlformats.org/drawingml/2006/main" xmlns:r="http://schemas.openxmlformats.org/officeDocument/2006/relationships" xmlns:p="http://schemas.openxmlformats.org/presentationml/2006/main" matchingName="两栏内容" type="twoObj">
   <p:cSld name="TWO_OBJECTS">
     <p:spTree>
       <p:nvGrpSpPr>
-        <p:cNvPr id="29" name="Shape 29"/>
+        <p:cNvPr id="1" name="Shape 29"/>
         <p:cNvGrpSpPr/>
         <p:nvPr/>
       </p:nvGrpSpPr>
@@ -8232,7 +8126,9 @@
       <p:sp>
         <p:nvSpPr>
           <p:cNvPr id="30" name="Shape 9"/>
-          <p:cNvSpPr txBox="1"/>
+          <p:cNvSpPr txBox="1">
+            <a:spLocks noGrp="1"/>
+          </p:cNvSpPr>
           <p:nvPr>
             <p:ph type="title"/>
           </p:nvPr>
@@ -8361,13 +8257,17 @@
               <a:defRPr/>
             </a:lvl9pPr>
           </a:lstStyle>
-          <a:p/>
+          <a:p>
+            <a:endParaRPr/>
+          </a:p>
         </p:txBody>
       </p:sp>
       <p:sp>
         <p:nvSpPr>
           <p:cNvPr id="31" name="Shape 10"/>
-          <p:cNvSpPr txBox="1"/>
+          <p:cNvSpPr txBox="1">
+            <a:spLocks noGrp="1"/>
+          </p:cNvSpPr>
           <p:nvPr>
             <p:ph type="body" idx="1"/>
           </p:nvPr>
@@ -8544,13 +8444,17 @@
               <a:defRPr/>
             </a:lvl9pPr>
           </a:lstStyle>
-          <a:p/>
+          <a:p>
+            <a:endParaRPr/>
+          </a:p>
         </p:txBody>
       </p:sp>
       <p:sp>
         <p:nvSpPr>
           <p:cNvPr id="32" name="Shape 11"/>
-          <p:cNvSpPr txBox="1"/>
+          <p:cNvSpPr txBox="1">
+            <a:spLocks noGrp="1"/>
+          </p:cNvSpPr>
           <p:nvPr>
             <p:ph type="body" idx="2"/>
           </p:nvPr>
@@ -8727,13 +8631,17 @@
               <a:defRPr/>
             </a:lvl9pPr>
           </a:lstStyle>
-          <a:p/>
+          <a:p>
+            <a:endParaRPr/>
+          </a:p>
         </p:txBody>
       </p:sp>
       <p:sp>
         <p:nvSpPr>
           <p:cNvPr id="33" name="Shape 12"/>
-          <p:cNvSpPr txBox="1"/>
+          <p:cNvSpPr txBox="1">
+            <a:spLocks noGrp="1"/>
+          </p:cNvSpPr>
           <p:nvPr>
             <p:ph type="dt" idx="10"/>
           </p:nvPr>
@@ -8856,13 +8764,17 @@
               <a:defRPr/>
             </a:lvl9pPr>
           </a:lstStyle>
-          <a:p/>
+          <a:p>
+            <a:endParaRPr/>
+          </a:p>
         </p:txBody>
       </p:sp>
       <p:sp>
         <p:nvSpPr>
           <p:cNvPr id="34" name="Shape 13"/>
-          <p:cNvSpPr txBox="1"/>
+          <p:cNvSpPr txBox="1">
+            <a:spLocks noGrp="1"/>
+          </p:cNvSpPr>
           <p:nvPr>
             <p:ph type="ftr" idx="11"/>
           </p:nvPr>
@@ -8985,13 +8897,17 @@
               <a:defRPr/>
             </a:lvl9pPr>
           </a:lstStyle>
-          <a:p/>
+          <a:p>
+            <a:endParaRPr/>
+          </a:p>
         </p:txBody>
       </p:sp>
       <p:sp>
         <p:nvSpPr>
           <p:cNvPr id="35" name="Shape 14"/>
-          <p:cNvSpPr txBox="1"/>
+          <p:cNvSpPr txBox="1">
+            <a:spLocks noGrp="1"/>
+          </p:cNvSpPr>
           <p:nvPr>
             <p:ph type="sldNum" idx="12"/>
           </p:nvPr>
@@ -9089,7 +9005,8 @@
               <a:buNone/>
             </a:pPr>
             <a:fld id="{00000000-1234-1234-1234-123412341234}" type="slidenum">
-              <a:rPr lang="zh-CN"/>
+              <a:rPr lang="en-US" altLang="zh-CN"/>
+              <a:t>‹#›</a:t>
             </a:fld>
             <a:endParaRPr lang="zh-CN"/>
           </a:p>
@@ -9104,11 +9021,11 @@
 </file>
 
 <file path=ppt/slideLayouts/slideLayout5.xml><?xml version="1.0" encoding="utf-8"?>
-<p:sldLayout xmlns:a="http://schemas.openxmlformats.org/drawingml/2006/main" xmlns:r="http://schemas.openxmlformats.org/officeDocument/2006/relationships" xmlns:p="http://schemas.openxmlformats.org/presentationml/2006/main" type="twoTxTwoObj" matchingName="比较">
+<p:sldLayout xmlns:a="http://schemas.openxmlformats.org/drawingml/2006/main" xmlns:r="http://schemas.openxmlformats.org/officeDocument/2006/relationships" xmlns:p="http://schemas.openxmlformats.org/presentationml/2006/main" matchingName="比较" type="twoTxTwoObj">
   <p:cSld name="TWO_OBJECTS_WITH_TEXT">
     <p:spTree>
       <p:nvGrpSpPr>
-        <p:cNvPr id="36" name="Shape 36"/>
+        <p:cNvPr id="1" name="Shape 36"/>
         <p:cNvGrpSpPr/>
         <p:nvPr/>
       </p:nvGrpSpPr>
@@ -9123,7 +9040,9 @@
       <p:sp>
         <p:nvSpPr>
           <p:cNvPr id="37" name="Shape 35"/>
-          <p:cNvSpPr txBox="1"/>
+          <p:cNvSpPr txBox="1">
+            <a:spLocks noGrp="1"/>
+          </p:cNvSpPr>
           <p:nvPr>
             <p:ph type="title"/>
           </p:nvPr>
@@ -9252,13 +9171,17 @@
               <a:defRPr/>
             </a:lvl9pPr>
           </a:lstStyle>
-          <a:p/>
+          <a:p>
+            <a:endParaRPr/>
+          </a:p>
         </p:txBody>
       </p:sp>
       <p:sp>
         <p:nvSpPr>
           <p:cNvPr id="38" name="Shape 36"/>
-          <p:cNvSpPr txBox="1"/>
+          <p:cNvSpPr txBox="1">
+            <a:spLocks noGrp="1"/>
+          </p:cNvSpPr>
           <p:nvPr>
             <p:ph type="body" idx="1"/>
           </p:nvPr>
@@ -9435,13 +9358,17 @@
               <a:defRPr sz="1200" b="1"/>
             </a:lvl9pPr>
           </a:lstStyle>
-          <a:p/>
+          <a:p>
+            <a:endParaRPr/>
+          </a:p>
         </p:txBody>
       </p:sp>
       <p:sp>
         <p:nvSpPr>
           <p:cNvPr id="39" name="Shape 37"/>
-          <p:cNvSpPr txBox="1"/>
+          <p:cNvSpPr txBox="1">
+            <a:spLocks noGrp="1"/>
+          </p:cNvSpPr>
           <p:nvPr>
             <p:ph type="body" idx="2"/>
           </p:nvPr>
@@ -9618,13 +9545,17 @@
               <a:defRPr/>
             </a:lvl9pPr>
           </a:lstStyle>
-          <a:p/>
+          <a:p>
+            <a:endParaRPr/>
+          </a:p>
         </p:txBody>
       </p:sp>
       <p:sp>
         <p:nvSpPr>
           <p:cNvPr id="40" name="Shape 38"/>
-          <p:cNvSpPr txBox="1"/>
+          <p:cNvSpPr txBox="1">
+            <a:spLocks noGrp="1"/>
+          </p:cNvSpPr>
           <p:nvPr>
             <p:ph type="body" idx="3"/>
           </p:nvPr>
@@ -9801,13 +9732,17 @@
               <a:defRPr sz="1200" b="1"/>
             </a:lvl9pPr>
           </a:lstStyle>
-          <a:p/>
+          <a:p>
+            <a:endParaRPr/>
+          </a:p>
         </p:txBody>
       </p:sp>
       <p:sp>
         <p:nvSpPr>
           <p:cNvPr id="41" name="Shape 39"/>
-          <p:cNvSpPr txBox="1"/>
+          <p:cNvSpPr txBox="1">
+            <a:spLocks noGrp="1"/>
+          </p:cNvSpPr>
           <p:nvPr>
             <p:ph type="body" idx="4"/>
           </p:nvPr>
@@ -9984,13 +9919,17 @@
               <a:defRPr/>
             </a:lvl9pPr>
           </a:lstStyle>
-          <a:p/>
+          <a:p>
+            <a:endParaRPr/>
+          </a:p>
         </p:txBody>
       </p:sp>
       <p:sp>
         <p:nvSpPr>
           <p:cNvPr id="42" name="Shape 40"/>
-          <p:cNvSpPr txBox="1"/>
+          <p:cNvSpPr txBox="1">
+            <a:spLocks noGrp="1"/>
+          </p:cNvSpPr>
           <p:nvPr>
             <p:ph type="dt" idx="10"/>
           </p:nvPr>
@@ -10113,13 +10052,17 @@
               <a:defRPr/>
             </a:lvl9pPr>
           </a:lstStyle>
-          <a:p/>
+          <a:p>
+            <a:endParaRPr/>
+          </a:p>
         </p:txBody>
       </p:sp>
       <p:sp>
         <p:nvSpPr>
           <p:cNvPr id="43" name="Shape 41"/>
-          <p:cNvSpPr txBox="1"/>
+          <p:cNvSpPr txBox="1">
+            <a:spLocks noGrp="1"/>
+          </p:cNvSpPr>
           <p:nvPr>
             <p:ph type="ftr" idx="11"/>
           </p:nvPr>
@@ -10242,13 +10185,17 @@
               <a:defRPr/>
             </a:lvl9pPr>
           </a:lstStyle>
-          <a:p/>
+          <a:p>
+            <a:endParaRPr/>
+          </a:p>
         </p:txBody>
       </p:sp>
       <p:sp>
         <p:nvSpPr>
           <p:cNvPr id="44" name="Shape 42"/>
-          <p:cNvSpPr txBox="1"/>
+          <p:cNvSpPr txBox="1">
+            <a:spLocks noGrp="1"/>
+          </p:cNvSpPr>
           <p:nvPr>
             <p:ph type="sldNum" idx="12"/>
           </p:nvPr>
@@ -10346,7 +10293,8 @@
               <a:buNone/>
             </a:pPr>
             <a:fld id="{00000000-1234-1234-1234-123412341234}" type="slidenum">
-              <a:rPr lang="zh-CN"/>
+              <a:rPr lang="en-US" altLang="zh-CN"/>
+              <a:t>‹#›</a:t>
             </a:fld>
             <a:endParaRPr lang="zh-CN"/>
           </a:p>
@@ -10361,11 +10309,11 @@
 </file>
 
 <file path=ppt/slideLayouts/slideLayout6.xml><?xml version="1.0" encoding="utf-8"?>
-<p:sldLayout xmlns:a="http://schemas.openxmlformats.org/drawingml/2006/main" xmlns:r="http://schemas.openxmlformats.org/officeDocument/2006/relationships" xmlns:p="http://schemas.openxmlformats.org/presentationml/2006/main" type="titleOnly" matchingName="仅标题">
+<p:sldLayout xmlns:a="http://schemas.openxmlformats.org/drawingml/2006/main" xmlns:r="http://schemas.openxmlformats.org/officeDocument/2006/relationships" xmlns:p="http://schemas.openxmlformats.org/presentationml/2006/main" matchingName="仅标题" type="titleOnly">
   <p:cSld name="TITLE_ONLY">
     <p:spTree>
       <p:nvGrpSpPr>
-        <p:cNvPr id="45" name="Shape 45"/>
+        <p:cNvPr id="1" name="Shape 45"/>
         <p:cNvGrpSpPr/>
         <p:nvPr/>
       </p:nvGrpSpPr>
@@ -10380,7 +10328,9 @@
       <p:sp>
         <p:nvSpPr>
           <p:cNvPr id="46" name="Shape 20"/>
-          <p:cNvSpPr txBox="1"/>
+          <p:cNvSpPr txBox="1">
+            <a:spLocks noGrp="1"/>
+          </p:cNvSpPr>
           <p:nvPr>
             <p:ph type="title"/>
           </p:nvPr>
@@ -10509,13 +10459,17 @@
               <a:defRPr/>
             </a:lvl9pPr>
           </a:lstStyle>
-          <a:p/>
+          <a:p>
+            <a:endParaRPr/>
+          </a:p>
         </p:txBody>
       </p:sp>
       <p:sp>
         <p:nvSpPr>
           <p:cNvPr id="47" name="Shape 21"/>
-          <p:cNvSpPr txBox="1"/>
+          <p:cNvSpPr txBox="1">
+            <a:spLocks noGrp="1"/>
+          </p:cNvSpPr>
           <p:nvPr>
             <p:ph type="dt" idx="10"/>
           </p:nvPr>
@@ -10638,13 +10592,17 @@
               <a:defRPr/>
             </a:lvl9pPr>
           </a:lstStyle>
-          <a:p/>
+          <a:p>
+            <a:endParaRPr/>
+          </a:p>
         </p:txBody>
       </p:sp>
       <p:sp>
         <p:nvSpPr>
           <p:cNvPr id="48" name="Shape 22"/>
-          <p:cNvSpPr txBox="1"/>
+          <p:cNvSpPr txBox="1">
+            <a:spLocks noGrp="1"/>
+          </p:cNvSpPr>
           <p:nvPr>
             <p:ph type="ftr" idx="11"/>
           </p:nvPr>
@@ -10767,13 +10725,17 @@
               <a:defRPr/>
             </a:lvl9pPr>
           </a:lstStyle>
-          <a:p/>
+          <a:p>
+            <a:endParaRPr/>
+          </a:p>
         </p:txBody>
       </p:sp>
       <p:sp>
         <p:nvSpPr>
           <p:cNvPr id="49" name="Shape 23"/>
-          <p:cNvSpPr txBox="1"/>
+          <p:cNvSpPr txBox="1">
+            <a:spLocks noGrp="1"/>
+          </p:cNvSpPr>
           <p:nvPr>
             <p:ph type="sldNum" idx="12"/>
           </p:nvPr>
@@ -10871,7 +10833,8 @@
               <a:buNone/>
             </a:pPr>
             <a:fld id="{00000000-1234-1234-1234-123412341234}" type="slidenum">
-              <a:rPr lang="zh-CN"/>
+              <a:rPr lang="en-US" altLang="zh-CN"/>
+              <a:t>‹#›</a:t>
             </a:fld>
             <a:endParaRPr lang="zh-CN"/>
           </a:p>
@@ -10886,11 +10849,11 @@
 </file>
 
 <file path=ppt/slideLayouts/slideLayout7.xml><?xml version="1.0" encoding="utf-8"?>
-<p:sldLayout xmlns:a="http://schemas.openxmlformats.org/drawingml/2006/main" xmlns:r="http://schemas.openxmlformats.org/officeDocument/2006/relationships" xmlns:p="http://schemas.openxmlformats.org/presentationml/2006/main" type="blank" matchingName="空白">
+<p:sldLayout xmlns:a="http://schemas.openxmlformats.org/drawingml/2006/main" xmlns:r="http://schemas.openxmlformats.org/officeDocument/2006/relationships" xmlns:p="http://schemas.openxmlformats.org/presentationml/2006/main" matchingName="空白" type="blank">
   <p:cSld name="BLANK">
     <p:spTree>
       <p:nvGrpSpPr>
-        <p:cNvPr id="50" name="Shape 50"/>
+        <p:cNvPr id="1" name="Shape 50"/>
         <p:cNvGrpSpPr/>
         <p:nvPr/>
       </p:nvGrpSpPr>
@@ -10905,7 +10868,9 @@
       <p:sp>
         <p:nvSpPr>
           <p:cNvPr id="51" name="Shape 6"/>
-          <p:cNvSpPr txBox="1"/>
+          <p:cNvSpPr txBox="1">
+            <a:spLocks noGrp="1"/>
+          </p:cNvSpPr>
           <p:nvPr>
             <p:ph type="dt" idx="10"/>
           </p:nvPr>
@@ -11028,13 +10993,17 @@
               <a:defRPr/>
             </a:lvl9pPr>
           </a:lstStyle>
-          <a:p/>
+          <a:p>
+            <a:endParaRPr/>
+          </a:p>
         </p:txBody>
       </p:sp>
       <p:sp>
         <p:nvSpPr>
           <p:cNvPr id="52" name="Shape 7"/>
-          <p:cNvSpPr txBox="1"/>
+          <p:cNvSpPr txBox="1">
+            <a:spLocks noGrp="1"/>
+          </p:cNvSpPr>
           <p:nvPr>
             <p:ph type="ftr" idx="11"/>
           </p:nvPr>
@@ -11157,13 +11126,17 @@
               <a:defRPr/>
             </a:lvl9pPr>
           </a:lstStyle>
-          <a:p/>
+          <a:p>
+            <a:endParaRPr/>
+          </a:p>
         </p:txBody>
       </p:sp>
       <p:sp>
         <p:nvSpPr>
           <p:cNvPr id="53" name="Shape 8"/>
-          <p:cNvSpPr txBox="1"/>
+          <p:cNvSpPr txBox="1">
+            <a:spLocks noGrp="1"/>
+          </p:cNvSpPr>
           <p:nvPr>
             <p:ph type="sldNum" idx="12"/>
           </p:nvPr>
@@ -11261,7 +11234,8 @@
               <a:buNone/>
             </a:pPr>
             <a:fld id="{00000000-1234-1234-1234-123412341234}" type="slidenum">
-              <a:rPr lang="zh-CN"/>
+              <a:rPr lang="en-US" altLang="zh-CN"/>
+              <a:t>‹#›</a:t>
             </a:fld>
             <a:endParaRPr lang="zh-CN"/>
           </a:p>
@@ -11276,11 +11250,11 @@
 </file>
 
 <file path=ppt/slideLayouts/slideLayout8.xml><?xml version="1.0" encoding="utf-8"?>
-<p:sldLayout xmlns:a="http://schemas.openxmlformats.org/drawingml/2006/main" xmlns:r="http://schemas.openxmlformats.org/officeDocument/2006/relationships" xmlns:p="http://schemas.openxmlformats.org/presentationml/2006/main" type="objTx" matchingName="内容与标题">
+<p:sldLayout xmlns:a="http://schemas.openxmlformats.org/drawingml/2006/main" xmlns:r="http://schemas.openxmlformats.org/officeDocument/2006/relationships" xmlns:p="http://schemas.openxmlformats.org/presentationml/2006/main" matchingName="内容与标题" type="objTx">
   <p:cSld name="OBJECT_WITH_CAPTION_TEXT">
     <p:spTree>
       <p:nvGrpSpPr>
-        <p:cNvPr id="54" name="Shape 54"/>
+        <p:cNvPr id="1" name="Shape 54"/>
         <p:cNvGrpSpPr/>
         <p:nvPr/>
       </p:nvGrpSpPr>
@@ -11295,7 +11269,9 @@
       <p:sp>
         <p:nvSpPr>
           <p:cNvPr id="55" name="Shape 43"/>
-          <p:cNvSpPr txBox="1"/>
+          <p:cNvSpPr txBox="1">
+            <a:spLocks noGrp="1"/>
+          </p:cNvSpPr>
           <p:nvPr>
             <p:ph type="title"/>
           </p:nvPr>
@@ -11425,13 +11401,17 @@
               <a:defRPr/>
             </a:lvl9pPr>
           </a:lstStyle>
-          <a:p/>
+          <a:p>
+            <a:endParaRPr/>
+          </a:p>
         </p:txBody>
       </p:sp>
       <p:sp>
         <p:nvSpPr>
           <p:cNvPr id="56" name="Shape 44"/>
-          <p:cNvSpPr txBox="1"/>
+          <p:cNvSpPr txBox="1">
+            <a:spLocks noGrp="1"/>
+          </p:cNvSpPr>
           <p:nvPr>
             <p:ph type="body" idx="1"/>
           </p:nvPr>
@@ -11608,13 +11588,17 @@
               <a:defRPr sz="1500"/>
             </a:lvl9pPr>
           </a:lstStyle>
-          <a:p/>
+          <a:p>
+            <a:endParaRPr/>
+          </a:p>
         </p:txBody>
       </p:sp>
       <p:sp>
         <p:nvSpPr>
           <p:cNvPr id="57" name="Shape 45"/>
-          <p:cNvSpPr txBox="1"/>
+          <p:cNvSpPr txBox="1">
+            <a:spLocks noGrp="1"/>
+          </p:cNvSpPr>
           <p:nvPr>
             <p:ph type="body" idx="2"/>
           </p:nvPr>
@@ -11791,13 +11775,17 @@
               <a:defRPr sz="800"/>
             </a:lvl9pPr>
           </a:lstStyle>
-          <a:p/>
+          <a:p>
+            <a:endParaRPr/>
+          </a:p>
         </p:txBody>
       </p:sp>
       <p:sp>
         <p:nvSpPr>
           <p:cNvPr id="58" name="Shape 46"/>
-          <p:cNvSpPr txBox="1"/>
+          <p:cNvSpPr txBox="1">
+            <a:spLocks noGrp="1"/>
+          </p:cNvSpPr>
           <p:nvPr>
             <p:ph type="dt" idx="10"/>
           </p:nvPr>
@@ -11920,13 +11908,17 @@
               <a:defRPr/>
             </a:lvl9pPr>
           </a:lstStyle>
-          <a:p/>
+          <a:p>
+            <a:endParaRPr/>
+          </a:p>
         </p:txBody>
       </p:sp>
       <p:sp>
         <p:nvSpPr>
           <p:cNvPr id="59" name="Shape 47"/>
-          <p:cNvSpPr txBox="1"/>
+          <p:cNvSpPr txBox="1">
+            <a:spLocks noGrp="1"/>
+          </p:cNvSpPr>
           <p:nvPr>
             <p:ph type="ftr" idx="11"/>
           </p:nvPr>
@@ -12049,13 +12041,17 @@
               <a:defRPr/>
             </a:lvl9pPr>
           </a:lstStyle>
-          <a:p/>
+          <a:p>
+            <a:endParaRPr/>
+          </a:p>
         </p:txBody>
       </p:sp>
       <p:sp>
         <p:nvSpPr>
           <p:cNvPr id="60" name="Shape 48"/>
-          <p:cNvSpPr txBox="1"/>
+          <p:cNvSpPr txBox="1">
+            <a:spLocks noGrp="1"/>
+          </p:cNvSpPr>
           <p:nvPr>
             <p:ph type="sldNum" idx="12"/>
           </p:nvPr>
@@ -12153,7 +12149,8 @@
               <a:buNone/>
             </a:pPr>
             <a:fld id="{00000000-1234-1234-1234-123412341234}" type="slidenum">
-              <a:rPr lang="zh-CN"/>
+              <a:rPr lang="en-US" altLang="zh-CN"/>
+              <a:t>‹#›</a:t>
             </a:fld>
             <a:endParaRPr lang="zh-CN"/>
           </a:p>
@@ -12168,11 +12165,11 @@
 </file>
 
 <file path=ppt/slideLayouts/slideLayout9.xml><?xml version="1.0" encoding="utf-8"?>
-<p:sldLayout xmlns:a="http://schemas.openxmlformats.org/drawingml/2006/main" xmlns:r="http://schemas.openxmlformats.org/officeDocument/2006/relationships" xmlns:p="http://schemas.openxmlformats.org/presentationml/2006/main" type="picTx" matchingName="图片与标题">
+<p:sldLayout xmlns:a="http://schemas.openxmlformats.org/drawingml/2006/main" xmlns:r="http://schemas.openxmlformats.org/officeDocument/2006/relationships" xmlns:p="http://schemas.openxmlformats.org/presentationml/2006/main" matchingName="图片与标题" type="picTx">
   <p:cSld name="PICTURE_WITH_CAPTION_TEXT">
     <p:spTree>
       <p:nvGrpSpPr>
-        <p:cNvPr id="61" name="Shape 61"/>
+        <p:cNvPr id="1" name="Shape 61"/>
         <p:cNvGrpSpPr/>
         <p:nvPr/>
       </p:nvGrpSpPr>
@@ -12187,7 +12184,9 @@
       <p:sp>
         <p:nvSpPr>
           <p:cNvPr id="62" name="Shape 24"/>
-          <p:cNvSpPr txBox="1"/>
+          <p:cNvSpPr txBox="1">
+            <a:spLocks noGrp="1"/>
+          </p:cNvSpPr>
           <p:nvPr>
             <p:ph type="title"/>
           </p:nvPr>
@@ -12317,13 +12316,17 @@
               <a:defRPr/>
             </a:lvl9pPr>
           </a:lstStyle>
-          <a:p/>
+          <a:p>
+            <a:endParaRPr/>
+          </a:p>
         </p:txBody>
       </p:sp>
       <p:sp>
         <p:nvSpPr>
           <p:cNvPr id="63" name="Shape 25"/>
-          <p:cNvSpPr/>
+          <p:cNvSpPr>
+            <a:spLocks noGrp="1"/>
+          </p:cNvSpPr>
           <p:nvPr>
             <p:ph type="pic" idx="2"/>
           </p:nvPr>
@@ -12345,7 +12348,9 @@
       <p:sp>
         <p:nvSpPr>
           <p:cNvPr id="64" name="Shape 26"/>
-          <p:cNvSpPr txBox="1"/>
+          <p:cNvSpPr txBox="1">
+            <a:spLocks noGrp="1"/>
+          </p:cNvSpPr>
           <p:nvPr>
             <p:ph type="body" idx="1"/>
           </p:nvPr>
@@ -12522,13 +12527,17 @@
               <a:defRPr sz="800"/>
             </a:lvl9pPr>
           </a:lstStyle>
-          <a:p/>
+          <a:p>
+            <a:endParaRPr/>
+          </a:p>
         </p:txBody>
       </p:sp>
       <p:sp>
         <p:nvSpPr>
           <p:cNvPr id="65" name="Shape 27"/>
-          <p:cNvSpPr txBox="1"/>
+          <p:cNvSpPr txBox="1">
+            <a:spLocks noGrp="1"/>
+          </p:cNvSpPr>
           <p:nvPr>
             <p:ph type="dt" idx="10"/>
           </p:nvPr>
@@ -12651,13 +12660,17 @@
               <a:defRPr/>
             </a:lvl9pPr>
           </a:lstStyle>
-          <a:p/>
+          <a:p>
+            <a:endParaRPr/>
+          </a:p>
         </p:txBody>
       </p:sp>
       <p:sp>
         <p:nvSpPr>
           <p:cNvPr id="66" name="Shape 28"/>
-          <p:cNvSpPr txBox="1"/>
+          <p:cNvSpPr txBox="1">
+            <a:spLocks noGrp="1"/>
+          </p:cNvSpPr>
           <p:nvPr>
             <p:ph type="ftr" idx="11"/>
           </p:nvPr>
@@ -12780,13 +12793,17 @@
               <a:defRPr/>
             </a:lvl9pPr>
           </a:lstStyle>
-          <a:p/>
+          <a:p>
+            <a:endParaRPr/>
+          </a:p>
         </p:txBody>
       </p:sp>
       <p:sp>
         <p:nvSpPr>
           <p:cNvPr id="67" name="Shape 29"/>
-          <p:cNvSpPr txBox="1"/>
+          <p:cNvSpPr txBox="1">
+            <a:spLocks noGrp="1"/>
+          </p:cNvSpPr>
           <p:nvPr>
             <p:ph type="sldNum" idx="12"/>
           </p:nvPr>
@@ -12884,7 +12901,8 @@
               <a:buNone/>
             </a:pPr>
             <a:fld id="{00000000-1234-1234-1234-123412341234}" type="slidenum">
-              <a:rPr lang="zh-CN"/>
+              <a:rPr lang="en-US" altLang="zh-CN"/>
+              <a:t>‹#›</a:t>
             </a:fld>
             <a:endParaRPr lang="zh-CN"/>
           </a:p>
@@ -12911,7 +12929,7 @@
     </p:bg>
     <p:spTree>
       <p:nvGrpSpPr>
-        <p:cNvPr id="5" name="Shape 5"/>
+        <p:cNvPr id="1" name="Shape 5"/>
         <p:cNvGrpSpPr/>
         <p:nvPr/>
       </p:nvGrpSpPr>
@@ -12926,7 +12944,9 @@
       <p:sp>
         <p:nvSpPr>
           <p:cNvPr id="6" name="Shape 1"/>
-          <p:cNvSpPr txBox="1"/>
+          <p:cNvSpPr txBox="1">
+            <a:spLocks noGrp="1"/>
+          </p:cNvSpPr>
           <p:nvPr>
             <p:ph type="title"/>
           </p:nvPr>
@@ -13064,13 +13084,17 @@
               <a:defRPr sz="1400"/>
             </a:lvl9pPr>
           </a:lstStyle>
-          <a:p/>
+          <a:p>
+            <a:endParaRPr/>
+          </a:p>
         </p:txBody>
       </p:sp>
       <p:sp>
         <p:nvSpPr>
           <p:cNvPr id="7" name="Shape 2"/>
-          <p:cNvSpPr txBox="1"/>
+          <p:cNvSpPr txBox="1">
+            <a:spLocks noGrp="1"/>
+          </p:cNvSpPr>
           <p:nvPr>
             <p:ph type="body" idx="1"/>
           </p:nvPr>
@@ -13328,13 +13352,17 @@
               </a:defRPr>
             </a:lvl9pPr>
           </a:lstStyle>
-          <a:p/>
+          <a:p>
+            <a:endParaRPr/>
+          </a:p>
         </p:txBody>
       </p:sp>
       <p:sp>
         <p:nvSpPr>
           <p:cNvPr id="8" name="Shape 3"/>
-          <p:cNvSpPr txBox="1"/>
+          <p:cNvSpPr txBox="1">
+            <a:spLocks noGrp="1"/>
+          </p:cNvSpPr>
           <p:nvPr>
             <p:ph type="dt" idx="10"/>
           </p:nvPr>
@@ -13529,13 +13557,17 @@
               </a:defRPr>
             </a:lvl9pPr>
           </a:lstStyle>
-          <a:p/>
+          <a:p>
+            <a:endParaRPr/>
+          </a:p>
         </p:txBody>
       </p:sp>
       <p:sp>
         <p:nvSpPr>
           <p:cNvPr id="9" name="Shape 4"/>
-          <p:cNvSpPr txBox="1"/>
+          <p:cNvSpPr txBox="1">
+            <a:spLocks noGrp="1"/>
+          </p:cNvSpPr>
           <p:nvPr>
             <p:ph type="ftr" idx="11"/>
           </p:nvPr>
@@ -13730,13 +13762,17 @@
               </a:defRPr>
             </a:lvl9pPr>
           </a:lstStyle>
-          <a:p/>
+          <a:p>
+            <a:endParaRPr/>
+          </a:p>
         </p:txBody>
       </p:sp>
       <p:sp>
         <p:nvSpPr>
           <p:cNvPr id="10" name="Shape 5"/>
-          <p:cNvSpPr txBox="1"/>
+          <p:cNvSpPr txBox="1">
+            <a:spLocks noGrp="1"/>
+          </p:cNvSpPr>
           <p:nvPr>
             <p:ph type="sldNum" idx="12"/>
           </p:nvPr>
@@ -13906,7 +13942,8 @@
               <a:buNone/>
             </a:pPr>
             <a:fld id="{00000000-1234-1234-1234-123412341234}" type="slidenum">
-              <a:rPr lang="zh-CN"/>
+              <a:rPr lang="en-US" altLang="zh-CN"/>
+              <a:t>‹#›</a:t>
             </a:fld>
             <a:endParaRPr lang="zh-CN"/>
           </a:p>
@@ -14636,7 +14673,7 @@
     </p:bg>
     <p:spTree>
       <p:nvGrpSpPr>
-        <p:cNvPr id="5" name="Shape 5"/>
+        <p:cNvPr id="1" name="Shape 5"/>
         <p:cNvGrpSpPr/>
         <p:nvPr/>
       </p:nvGrpSpPr>
@@ -15502,6 +15539,7 @@
             <a:pPr algn="ctr">
               <a:defRPr/>
             </a:pPr>
+            <a:endParaRPr/>
           </a:p>
         </p:txBody>
       </p:sp>
@@ -15838,15 +15876,6 @@
               </a:rPr>
               <a:t>· 服务端 + Agent Runtime（569 文件）</a:t>
             </a:r>
-            <a:endParaRPr lang="en-US" sz="1300" b="0" i="0" u="none" strike="noStrike">
-              <a:solidFill>
-                <a:srgbClr val="475569"/>
-              </a:solidFill>
-              <a:latin typeface="Noto Sans SC" panose="020B0200000000000000" charset="-122"/>
-              <a:ea typeface="Noto Sans SC" panose="020B0200000000000000" charset="-122"/>
-              <a:cs typeface="Noto Sans SC" panose="020B0200000000000000" charset="-122"/>
-              <a:sym typeface="Noto Sans SC" panose="020B0200000000000000" charset="-122"/>
-            </a:endParaRPr>
           </a:p>
           <a:p>
             <a:pPr marL="0" indent="0" algn="l">
@@ -15866,15 +15895,6 @@
               </a:rPr>
               <a:t>· 实时协作（CRDT 消息 / 文档 / 表格 / PPT）</a:t>
             </a:r>
-            <a:endParaRPr lang="en-US" sz="1300" b="0" i="0" u="none" strike="noStrike">
-              <a:solidFill>
-                <a:srgbClr val="475569"/>
-              </a:solidFill>
-              <a:latin typeface="Noto Sans SC" panose="020B0200000000000000" charset="-122"/>
-              <a:ea typeface="Noto Sans SC" panose="020B0200000000000000" charset="-122"/>
-              <a:cs typeface="Noto Sans SC" panose="020B0200000000000000" charset="-122"/>
-              <a:sym typeface="Noto Sans SC" panose="020B0200000000000000" charset="-122"/>
-            </a:endParaRPr>
           </a:p>
           <a:p>
             <a:pPr marL="0" indent="0" algn="l">
@@ -15894,15 +15914,6 @@
               </a:rPr>
               <a:t>· 模型管理与管理后台</a:t>
             </a:r>
-            <a:endParaRPr lang="en-US" sz="1300" b="0" i="0" u="none" strike="noStrike">
-              <a:solidFill>
-                <a:srgbClr val="475569"/>
-              </a:solidFill>
-              <a:latin typeface="Noto Sans SC" panose="020B0200000000000000" charset="-122"/>
-              <a:ea typeface="Noto Sans SC" panose="020B0200000000000000" charset="-122"/>
-              <a:cs typeface="Noto Sans SC" panose="020B0200000000000000" charset="-122"/>
-              <a:sym typeface="Noto Sans SC" panose="020B0200000000000000" charset="-122"/>
-            </a:endParaRPr>
           </a:p>
           <a:p>
             <a:pPr marL="0" indent="0" algn="l">
@@ -15922,15 +15933,6 @@
               </a:rPr>
               <a:t>· 许可证 AGPL-3.0，可自部署</a:t>
             </a:r>
-            <a:endParaRPr lang="en-US" sz="1300" b="0" i="0" u="none" strike="noStrike">
-              <a:solidFill>
-                <a:srgbClr val="475569"/>
-              </a:solidFill>
-              <a:latin typeface="Noto Sans SC" panose="020B0200000000000000" charset="-122"/>
-              <a:ea typeface="Noto Sans SC" panose="020B0200000000000000" charset="-122"/>
-              <a:cs typeface="Noto Sans SC" panose="020B0200000000000000" charset="-122"/>
-              <a:sym typeface="Noto Sans SC" panose="020B0200000000000000" charset="-122"/>
-            </a:endParaRPr>
           </a:p>
         </p:txBody>
       </p:sp>
@@ -16417,15 +16419,39 @@
                 <a:effectLst/>
               </a:tblPr>
               <a:tblGrid>
-                <a:gridCol w="1651000"/>
-                <a:gridCol w="2794000"/>
-                <a:gridCol w="2794000"/>
-                <a:gridCol w="2921000"/>
+                <a:gridCol w="1651000">
+                  <a:extLst>
+                    <a:ext uri="{9D8B030D-6E8A-4147-A177-3AD203B41FA5}">
+                      <a16:colId xmlns:a16="http://schemas.microsoft.com/office/drawing/2014/main" val="20000"/>
+                    </a:ext>
+                  </a:extLst>
+                </a:gridCol>
+                <a:gridCol w="2794000">
+                  <a:extLst>
+                    <a:ext uri="{9D8B030D-6E8A-4147-A177-3AD203B41FA5}">
+                      <a16:colId xmlns:a16="http://schemas.microsoft.com/office/drawing/2014/main" val="20001"/>
+                    </a:ext>
+                  </a:extLst>
+                </a:gridCol>
+                <a:gridCol w="2794000">
+                  <a:extLst>
+                    <a:ext uri="{9D8B030D-6E8A-4147-A177-3AD203B41FA5}">
+                      <a16:colId xmlns:a16="http://schemas.microsoft.com/office/drawing/2014/main" val="20002"/>
+                    </a:ext>
+                  </a:extLst>
+                </a:gridCol>
+                <a:gridCol w="2921000">
+                  <a:extLst>
+                    <a:ext uri="{9D8B030D-6E8A-4147-A177-3AD203B41FA5}">
+                      <a16:colId xmlns:a16="http://schemas.microsoft.com/office/drawing/2014/main" val="20003"/>
+                    </a:ext>
+                  </a:extLst>
+                </a:gridCol>
               </a:tblGrid>
               <a:tr h="469900">
                 <a:tc>
                   <a:txBody>
-                    <a:bodyPr rtlCol="0"/>
+                    <a:bodyPr/>
                     <a:lstStyle/>
                     <a:p>
                       <a:pPr marL="0" indent="0" algn="ctr">
@@ -16449,7 +16475,7 @@
                       <a:endParaRPr lang="en-US" sz="1100"/>
                     </a:p>
                   </a:txBody>
-                  <a:tcPr marL="101600" marR="101600" marT="101600" marB="101600" anchor="t" anchorCtr="0">
+                  <a:tcPr marL="101600" marR="101600" marT="101600" marB="101600">
                     <a:lnL>
                       <a:noFill/>
                     </a:lnL>
@@ -16471,7 +16497,7 @@
                 </a:tc>
                 <a:tc>
                   <a:txBody>
-                    <a:bodyPr rtlCol="0"/>
+                    <a:bodyPr/>
                     <a:lstStyle/>
                     <a:p>
                       <a:pPr marL="0" indent="0" algn="ctr">
@@ -16495,7 +16521,7 @@
                       <a:endParaRPr lang="en-US" sz="1100"/>
                     </a:p>
                   </a:txBody>
-                  <a:tcPr marL="101600" marR="101600" marT="101600" marB="101600" anchor="t" anchorCtr="0">
+                  <a:tcPr marL="101600" marR="101600" marT="101600" marB="101600">
                     <a:lnL>
                       <a:noFill/>
                     </a:lnL>
@@ -16517,7 +16543,7 @@
                 </a:tc>
                 <a:tc>
                   <a:txBody>
-                    <a:bodyPr rtlCol="0"/>
+                    <a:bodyPr/>
                     <a:lstStyle/>
                     <a:p>
                       <a:pPr marL="0" indent="0" algn="ctr">
@@ -16541,7 +16567,7 @@
                       <a:endParaRPr lang="en-US" sz="1100"/>
                     </a:p>
                   </a:txBody>
-                  <a:tcPr marL="101600" marR="101600" marT="101600" marB="101600" anchor="t" anchorCtr="0">
+                  <a:tcPr marL="101600" marR="101600" marT="101600" marB="101600">
                     <a:lnL>
                       <a:noFill/>
                     </a:lnL>
@@ -16563,7 +16589,7 @@
                 </a:tc>
                 <a:tc>
                   <a:txBody>
-                    <a:bodyPr rtlCol="0"/>
+                    <a:bodyPr/>
                     <a:lstStyle/>
                     <a:p>
                       <a:pPr marL="0" indent="0" algn="ctr">
@@ -16587,7 +16613,7 @@
                       <a:endParaRPr lang="en-US" sz="1100"/>
                     </a:p>
                   </a:txBody>
-                  <a:tcPr marL="101600" marR="101600" marT="101600" marB="101600" anchor="t" anchorCtr="0">
+                  <a:tcPr marL="101600" marR="101600" marT="101600" marB="101600">
                     <a:lnL>
                       <a:noFill/>
                     </a:lnL>
@@ -16607,11 +16633,16 @@
                     </a:solidFill>
                   </a:tcPr>
                 </a:tc>
+                <a:extLst>
+                  <a:ext uri="{0D108BD9-81ED-4DB2-BD59-A6C34878D82A}">
+                    <a16:rowId xmlns:a16="http://schemas.microsoft.com/office/drawing/2014/main" val="10000"/>
+                  </a:ext>
+                </a:extLst>
               </a:tr>
               <a:tr h="622300">
                 <a:tc>
                   <a:txBody>
-                    <a:bodyPr rtlCol="0"/>
+                    <a:bodyPr/>
                     <a:lstStyle/>
                     <a:p>
                       <a:pPr marL="0" indent="0" algn="ctr">
@@ -16635,7 +16666,7 @@
                       <a:endParaRPr lang="en-US" sz="1100"/>
                     </a:p>
                   </a:txBody>
-                  <a:tcPr marL="101600" marR="101600" marT="101600" marB="101600" anchor="t" anchorCtr="0">
+                  <a:tcPr marL="101600" marR="101600" marT="101600" marB="101600">
                     <a:lnL>
                       <a:noFill/>
                     </a:lnL>
@@ -16657,7 +16688,7 @@
                 </a:tc>
                 <a:tc>
                   <a:txBody>
-                    <a:bodyPr rtlCol="0"/>
+                    <a:bodyPr/>
                     <a:lstStyle/>
                     <a:p>
                       <a:pPr marL="0" indent="0" algn="ctr">
@@ -16681,7 +16712,7 @@
                       <a:endParaRPr lang="en-US" sz="1100"/>
                     </a:p>
                   </a:txBody>
-                  <a:tcPr marL="101600" marR="101600" marT="101600" marB="101600" anchor="t" anchorCtr="0">
+                  <a:tcPr marL="101600" marR="101600" marT="101600" marB="101600">
                     <a:lnL>
                       <a:noFill/>
                     </a:lnL>
@@ -16699,7 +16730,7 @@
                 </a:tc>
                 <a:tc>
                   <a:txBody>
-                    <a:bodyPr rtlCol="0"/>
+                    <a:bodyPr/>
                     <a:lstStyle/>
                     <a:p>
                       <a:pPr marL="0" indent="0" algn="ctr">
@@ -16723,7 +16754,7 @@
                       <a:endParaRPr lang="en-US" sz="1100"/>
                     </a:p>
                   </a:txBody>
-                  <a:tcPr marL="101600" marR="101600" marT="101600" marB="101600" anchor="t" anchorCtr="0">
+                  <a:tcPr marL="101600" marR="101600" marT="101600" marB="101600">
                     <a:lnL>
                       <a:noFill/>
                     </a:lnL>
@@ -16741,7 +16772,7 @@
                 </a:tc>
                 <a:tc>
                   <a:txBody>
-                    <a:bodyPr rtlCol="0"/>
+                    <a:bodyPr/>
                     <a:lstStyle/>
                     <a:p>
                       <a:pPr marL="0" indent="0" algn="ctr">
@@ -16765,7 +16796,7 @@
                       <a:endParaRPr lang="en-US" sz="1100"/>
                     </a:p>
                   </a:txBody>
-                  <a:tcPr marL="101600" marR="101600" marT="101600" marB="101600" anchor="t" anchorCtr="0">
+                  <a:tcPr marL="101600" marR="101600" marT="101600" marB="101600">
                     <a:lnL>
                       <a:noFill/>
                     </a:lnL>
@@ -16781,11 +16812,16 @@
                     <a:noFill/>
                   </a:tcPr>
                 </a:tc>
+                <a:extLst>
+                  <a:ext uri="{0D108BD9-81ED-4DB2-BD59-A6C34878D82A}">
+                    <a16:rowId xmlns:a16="http://schemas.microsoft.com/office/drawing/2014/main" val="10001"/>
+                  </a:ext>
+                </a:extLst>
               </a:tr>
               <a:tr h="622300">
                 <a:tc>
                   <a:txBody>
-                    <a:bodyPr rtlCol="0"/>
+                    <a:bodyPr/>
                     <a:lstStyle/>
                     <a:p>
                       <a:pPr marL="0" indent="0" algn="ctr">
@@ -16809,7 +16845,7 @@
                       <a:endParaRPr lang="en-US" sz="1100"/>
                     </a:p>
                   </a:txBody>
-                  <a:tcPr marL="101600" marR="101600" marT="101600" marB="101600" anchor="t" anchorCtr="0">
+                  <a:tcPr marL="101600" marR="101600" marT="101600" marB="101600">
                     <a:lnL>
                       <a:noFill/>
                     </a:lnL>
@@ -16831,7 +16867,7 @@
                 </a:tc>
                 <a:tc>
                   <a:txBody>
-                    <a:bodyPr rtlCol="0"/>
+                    <a:bodyPr/>
                     <a:lstStyle/>
                     <a:p>
                       <a:pPr marL="0" indent="0" algn="ctr">
@@ -16855,7 +16891,7 @@
                       <a:endParaRPr lang="en-US" sz="1100"/>
                     </a:p>
                   </a:txBody>
-                  <a:tcPr marL="101600" marR="101600" marT="101600" marB="101600" anchor="t" anchorCtr="0">
+                  <a:tcPr marL="101600" marR="101600" marT="101600" marB="101600">
                     <a:lnL>
                       <a:noFill/>
                     </a:lnL>
@@ -16873,7 +16909,7 @@
                 </a:tc>
                 <a:tc>
                   <a:txBody>
-                    <a:bodyPr rtlCol="0"/>
+                    <a:bodyPr/>
                     <a:lstStyle/>
                     <a:p>
                       <a:pPr marL="0" indent="0" algn="ctr">
@@ -16897,7 +16933,7 @@
                       <a:endParaRPr lang="en-US" sz="1100"/>
                     </a:p>
                   </a:txBody>
-                  <a:tcPr marL="101600" marR="101600" marT="101600" marB="101600" anchor="t" anchorCtr="0">
+                  <a:tcPr marL="101600" marR="101600" marT="101600" marB="101600">
                     <a:lnL>
                       <a:noFill/>
                     </a:lnL>
@@ -16915,7 +16951,7 @@
                 </a:tc>
                 <a:tc>
                   <a:txBody>
-                    <a:bodyPr rtlCol="0"/>
+                    <a:bodyPr/>
                     <a:lstStyle/>
                     <a:p>
                       <a:pPr marL="0" indent="0" algn="ctr">
@@ -16939,7 +16975,7 @@
                       <a:endParaRPr lang="en-US" sz="1100"/>
                     </a:p>
                   </a:txBody>
-                  <a:tcPr marL="101600" marR="101600" marT="101600" marB="101600" anchor="t" anchorCtr="0">
+                  <a:tcPr marL="101600" marR="101600" marT="101600" marB="101600">
                     <a:lnL>
                       <a:noFill/>
                     </a:lnL>
@@ -16955,11 +16991,16 @@
                     <a:noFill/>
                   </a:tcPr>
                 </a:tc>
+                <a:extLst>
+                  <a:ext uri="{0D108BD9-81ED-4DB2-BD59-A6C34878D82A}">
+                    <a16:rowId xmlns:a16="http://schemas.microsoft.com/office/drawing/2014/main" val="10002"/>
+                  </a:ext>
+                </a:extLst>
               </a:tr>
               <a:tr h="622300">
                 <a:tc>
                   <a:txBody>
-                    <a:bodyPr rtlCol="0"/>
+                    <a:bodyPr/>
                     <a:lstStyle/>
                     <a:p>
                       <a:pPr marL="0" indent="0" algn="ctr">
@@ -16983,7 +17024,7 @@
                       <a:endParaRPr lang="en-US" sz="1100"/>
                     </a:p>
                   </a:txBody>
-                  <a:tcPr marL="101600" marR="101600" marT="101600" marB="101600" anchor="t" anchorCtr="0">
+                  <a:tcPr marL="101600" marR="101600" marT="101600" marB="101600">
                     <a:lnL>
                       <a:noFill/>
                     </a:lnL>
@@ -17005,7 +17046,7 @@
                 </a:tc>
                 <a:tc>
                   <a:txBody>
-                    <a:bodyPr rtlCol="0"/>
+                    <a:bodyPr/>
                     <a:lstStyle/>
                     <a:p>
                       <a:pPr marL="0" indent="0" algn="ctr">
@@ -17029,7 +17070,7 @@
                       <a:endParaRPr lang="en-US" sz="1100"/>
                     </a:p>
                   </a:txBody>
-                  <a:tcPr marL="101600" marR="101600" marT="101600" marB="101600" anchor="t" anchorCtr="0">
+                  <a:tcPr marL="101600" marR="101600" marT="101600" marB="101600">
                     <a:lnL>
                       <a:noFill/>
                     </a:lnL>
@@ -17047,7 +17088,7 @@
                 </a:tc>
                 <a:tc>
                   <a:txBody>
-                    <a:bodyPr rtlCol="0"/>
+                    <a:bodyPr/>
                     <a:lstStyle/>
                     <a:p>
                       <a:pPr marL="0" indent="0" algn="ctr">
@@ -17071,7 +17112,7 @@
                       <a:endParaRPr lang="en-US" sz="1100"/>
                     </a:p>
                   </a:txBody>
-                  <a:tcPr marL="101600" marR="101600" marT="101600" marB="101600" anchor="t" anchorCtr="0">
+                  <a:tcPr marL="101600" marR="101600" marT="101600" marB="101600">
                     <a:lnL>
                       <a:noFill/>
                     </a:lnL>
@@ -17089,7 +17130,7 @@
                 </a:tc>
                 <a:tc>
                   <a:txBody>
-                    <a:bodyPr rtlCol="0"/>
+                    <a:bodyPr/>
                     <a:lstStyle/>
                     <a:p>
                       <a:pPr marL="0" indent="0" algn="ctr">
@@ -17113,7 +17154,7 @@
                       <a:endParaRPr lang="en-US" sz="1100"/>
                     </a:p>
                   </a:txBody>
-                  <a:tcPr marL="101600" marR="101600" marT="101600" marB="101600" anchor="t" anchorCtr="0">
+                  <a:tcPr marL="101600" marR="101600" marT="101600" marB="101600">
                     <a:lnL>
                       <a:noFill/>
                     </a:lnL>
@@ -17129,11 +17170,16 @@
                     <a:noFill/>
                   </a:tcPr>
                 </a:tc>
+                <a:extLst>
+                  <a:ext uri="{0D108BD9-81ED-4DB2-BD59-A6C34878D82A}">
+                    <a16:rowId xmlns:a16="http://schemas.microsoft.com/office/drawing/2014/main" val="10003"/>
+                  </a:ext>
+                </a:extLst>
               </a:tr>
               <a:tr h="622300">
                 <a:tc>
                   <a:txBody>
-                    <a:bodyPr rtlCol="0"/>
+                    <a:bodyPr/>
                     <a:lstStyle/>
                     <a:p>
                       <a:pPr marL="0" indent="0" algn="ctr">
@@ -17157,7 +17203,7 @@
                       <a:endParaRPr lang="en-US" sz="1100"/>
                     </a:p>
                   </a:txBody>
-                  <a:tcPr marL="101600" marR="101600" marT="101600" marB="101600" anchor="t" anchorCtr="0">
+                  <a:tcPr marL="101600" marR="101600" marT="101600" marB="101600">
                     <a:lnL>
                       <a:noFill/>
                     </a:lnL>
@@ -17179,7 +17225,7 @@
                 </a:tc>
                 <a:tc>
                   <a:txBody>
-                    <a:bodyPr rtlCol="0"/>
+                    <a:bodyPr/>
                     <a:lstStyle/>
                     <a:p>
                       <a:pPr marL="0" indent="0" algn="ctr">
@@ -17203,7 +17249,7 @@
                       <a:endParaRPr lang="en-US" sz="1100"/>
                     </a:p>
                   </a:txBody>
-                  <a:tcPr marL="101600" marR="101600" marT="101600" marB="101600" anchor="t" anchorCtr="0">
+                  <a:tcPr marL="101600" marR="101600" marT="101600" marB="101600">
                     <a:lnL>
                       <a:noFill/>
                     </a:lnL>
@@ -17221,7 +17267,7 @@
                 </a:tc>
                 <a:tc>
                   <a:txBody>
-                    <a:bodyPr rtlCol="0"/>
+                    <a:bodyPr/>
                     <a:lstStyle/>
                     <a:p>
                       <a:pPr marL="0" indent="0" algn="ctr">
@@ -17245,7 +17291,7 @@
                       <a:endParaRPr lang="en-US" sz="1100"/>
                     </a:p>
                   </a:txBody>
-                  <a:tcPr marL="101600" marR="101600" marT="101600" marB="101600" anchor="t" anchorCtr="0">
+                  <a:tcPr marL="101600" marR="101600" marT="101600" marB="101600">
                     <a:lnL>
                       <a:noFill/>
                     </a:lnL>
@@ -17263,7 +17309,7 @@
                 </a:tc>
                 <a:tc>
                   <a:txBody>
-                    <a:bodyPr rtlCol="0"/>
+                    <a:bodyPr/>
                     <a:lstStyle/>
                     <a:p>
                       <a:pPr marL="0" indent="0" algn="ctr">
@@ -17287,7 +17333,7 @@
                       <a:endParaRPr lang="en-US" sz="1100"/>
                     </a:p>
                   </a:txBody>
-                  <a:tcPr marL="101600" marR="101600" marT="101600" marB="101600" anchor="t" anchorCtr="0">
+                  <a:tcPr marL="101600" marR="101600" marT="101600" marB="101600">
                     <a:lnL>
                       <a:noFill/>
                     </a:lnL>
@@ -17303,11 +17349,16 @@
                     <a:noFill/>
                   </a:tcPr>
                 </a:tc>
+                <a:extLst>
+                  <a:ext uri="{0D108BD9-81ED-4DB2-BD59-A6C34878D82A}">
+                    <a16:rowId xmlns:a16="http://schemas.microsoft.com/office/drawing/2014/main" val="10004"/>
+                  </a:ext>
+                </a:extLst>
               </a:tr>
               <a:tr h="596900">
                 <a:tc>
                   <a:txBody>
-                    <a:bodyPr rtlCol="0"/>
+                    <a:bodyPr/>
                     <a:lstStyle/>
                     <a:p>
                       <a:pPr marL="0" indent="0" algn="ctr">
@@ -17331,7 +17382,7 @@
                       <a:endParaRPr lang="en-US" sz="1100"/>
                     </a:p>
                   </a:txBody>
-                  <a:tcPr marL="101600" marR="101600" marT="101600" marB="101600" anchor="t" anchorCtr="0">
+                  <a:tcPr marL="101600" marR="101600" marT="101600" marB="101600">
                     <a:lnL>
                       <a:noFill/>
                     </a:lnL>
@@ -17353,7 +17404,7 @@
                 </a:tc>
                 <a:tc>
                   <a:txBody>
-                    <a:bodyPr rtlCol="0"/>
+                    <a:bodyPr/>
                     <a:lstStyle/>
                     <a:p>
                       <a:pPr marL="0" indent="0" algn="ctr">
@@ -17377,7 +17428,7 @@
                       <a:endParaRPr lang="en-US" sz="1100"/>
                     </a:p>
                   </a:txBody>
-                  <a:tcPr marL="101600" marR="101600" marT="101600" marB="101600" anchor="t" anchorCtr="0">
+                  <a:tcPr marL="101600" marR="101600" marT="101600" marB="101600">
                     <a:lnL>
                       <a:noFill/>
                     </a:lnL>
@@ -17395,7 +17446,7 @@
                 </a:tc>
                 <a:tc>
                   <a:txBody>
-                    <a:bodyPr rtlCol="0"/>
+                    <a:bodyPr/>
                     <a:lstStyle/>
                     <a:p>
                       <a:pPr marL="0" indent="0" algn="ctr">
@@ -17419,7 +17470,7 @@
                       <a:endParaRPr lang="en-US" sz="1100"/>
                     </a:p>
                   </a:txBody>
-                  <a:tcPr marL="101600" marR="101600" marT="101600" marB="101600" anchor="t" anchorCtr="0">
+                  <a:tcPr marL="101600" marR="101600" marT="101600" marB="101600">
                     <a:lnL>
                       <a:noFill/>
                     </a:lnL>
@@ -17437,7 +17488,7 @@
                 </a:tc>
                 <a:tc>
                   <a:txBody>
-                    <a:bodyPr rtlCol="0"/>
+                    <a:bodyPr/>
                     <a:lstStyle/>
                     <a:p>
                       <a:pPr marL="0" indent="0" algn="ctr">
@@ -17461,7 +17512,7 @@
                       <a:endParaRPr lang="en-US" sz="1100"/>
                     </a:p>
                   </a:txBody>
-                  <a:tcPr marL="101600" marR="101600" marT="101600" marB="101600" anchor="t" anchorCtr="0">
+                  <a:tcPr marL="101600" marR="101600" marT="101600" marB="101600">
                     <a:lnL>
                       <a:noFill/>
                     </a:lnL>
@@ -17477,6 +17528,11 @@
                     <a:noFill/>
                   </a:tcPr>
                 </a:tc>
+                <a:extLst>
+                  <a:ext uri="{0D108BD9-81ED-4DB2-BD59-A6C34878D82A}">
+                    <a16:rowId xmlns:a16="http://schemas.microsoft.com/office/drawing/2014/main" val="10005"/>
+                  </a:ext>
+                </a:extLst>
               </a:tr>
             </a:tbl>
           </a:graphicData>
@@ -17645,6 +17701,7 @@
             <a:pPr algn="ctr">
               <a:defRPr/>
             </a:pPr>
+            <a:endParaRPr/>
           </a:p>
         </p:txBody>
       </p:sp>
@@ -17782,15 +17839,6 @@
               </a:rPr>
               <a:t>，不被层级汇报压平</a:t>
             </a:r>
-            <a:endParaRPr lang="en-US" sz="1300" b="0" i="0" u="none" strike="noStrike">
-              <a:solidFill>
-                <a:srgbClr val="475569"/>
-              </a:solidFill>
-              <a:latin typeface="Noto Sans SC" panose="020B0200000000000000" charset="-122"/>
-              <a:ea typeface="Noto Sans SC" panose="020B0200000000000000" charset="-122"/>
-              <a:cs typeface="Noto Sans SC" panose="020B0200000000000000" charset="-122"/>
-              <a:sym typeface="Noto Sans SC" panose="020B0200000000000000" charset="-122"/>
-            </a:endParaRPr>
           </a:p>
         </p:txBody>
       </p:sp>
@@ -17828,6 +17876,7 @@
             <a:pPr algn="ctr">
               <a:defRPr/>
             </a:pPr>
+            <a:endParaRPr/>
           </a:p>
         </p:txBody>
       </p:sp>
@@ -17965,15 +18014,6 @@
               </a:rPr>
               <a:t>，不被交接丢掉</a:t>
             </a:r>
-            <a:endParaRPr lang="en-US" sz="1300" b="0" i="0" u="none" strike="noStrike">
-              <a:solidFill>
-                <a:srgbClr val="475569"/>
-              </a:solidFill>
-              <a:latin typeface="Noto Sans SC" panose="020B0200000000000000" charset="-122"/>
-              <a:ea typeface="Noto Sans SC" panose="020B0200000000000000" charset="-122"/>
-              <a:cs typeface="Noto Sans SC" panose="020B0200000000000000" charset="-122"/>
-              <a:sym typeface="Noto Sans SC" panose="020B0200000000000000" charset="-122"/>
-            </a:endParaRPr>
           </a:p>
         </p:txBody>
       </p:sp>
@@ -18062,6 +18102,7 @@
             <a:pPr algn="ctr">
               <a:defRPr/>
             </a:pPr>
+            <a:endParaRPr/>
           </a:p>
         </p:txBody>
       </p:sp>
@@ -18140,15 +18181,6 @@
               </a:rPr>
               <a:t>有损摘要</a:t>
             </a:r>
-            <a:endParaRPr lang="en-US" sz="1500" b="1" i="0" u="none" strike="noStrike">
-              <a:solidFill>
-                <a:srgbClr val="0D1326"/>
-              </a:solidFill>
-              <a:latin typeface="Noto Sans SC" panose="020B0200000000000000" charset="-122"/>
-              <a:ea typeface="Noto Sans SC" panose="020B0200000000000000" charset="-122"/>
-              <a:cs typeface="Noto Sans SC" panose="020B0200000000000000" charset="-122"/>
-              <a:sym typeface="Noto Sans SC" panose="020B0200000000000000" charset="-122"/>
-            </a:endParaRPr>
           </a:p>
         </p:txBody>
       </p:sp>
@@ -18319,6 +18351,7 @@
             <a:pPr algn="ctr">
               <a:defRPr/>
             </a:pPr>
+            <a:endParaRPr/>
           </a:p>
         </p:txBody>
       </p:sp>
@@ -18409,15 +18442,6 @@
               </a:rPr>
               <a:t>一起交出去。</a:t>
             </a:r>
-            <a:endParaRPr lang="en-US" sz="1700" b="0" i="0" u="none" strike="noStrike">
-              <a:solidFill>
-                <a:srgbClr val="0D1326"/>
-              </a:solidFill>
-              <a:latin typeface="Noto Sans SC" panose="020B0200000000000000" charset="-122"/>
-              <a:ea typeface="Noto Sans SC" panose="020B0200000000000000" charset="-122"/>
-              <a:cs typeface="Noto Sans SC" panose="020B0200000000000000" charset="-122"/>
-              <a:sym typeface="Noto Sans SC" panose="020B0200000000000000" charset="-122"/>
-            </a:endParaRPr>
           </a:p>
         </p:txBody>
       </p:sp>
@@ -18496,15 +18520,6 @@
               </a:rPr>
               <a:t>让工作能被下一个人接得住。</a:t>
             </a:r>
-            <a:endParaRPr lang="en-US" sz="1500" b="1" i="0" u="none" strike="noStrike">
-              <a:solidFill>
-                <a:srgbClr val="0D1326"/>
-              </a:solidFill>
-              <a:latin typeface="Noto Sans SC" panose="020B0200000000000000" charset="-122"/>
-              <a:ea typeface="Noto Sans SC" panose="020B0200000000000000" charset="-122"/>
-              <a:cs typeface="Noto Sans SC" panose="020B0200000000000000" charset="-122"/>
-              <a:sym typeface="Noto Sans SC" panose="020B0200000000000000" charset="-122"/>
-            </a:endParaRPr>
           </a:p>
         </p:txBody>
       </p:sp>
@@ -18677,15 +18692,6 @@
               </a:rPr>
               <a:t>。</a:t>
             </a:r>
-            <a:endParaRPr lang="en-US" sz="3400" b="1" i="0" u="none" strike="noStrike">
-              <a:solidFill>
-                <a:srgbClr val="FFFFFF"/>
-              </a:solidFill>
-              <a:latin typeface="Noto Sans SC" panose="020B0200000000000000" charset="-122"/>
-              <a:ea typeface="Noto Sans SC" panose="020B0200000000000000" charset="-122"/>
-              <a:cs typeface="Noto Sans SC" panose="020B0200000000000000" charset="-122"/>
-              <a:sym typeface="Noto Sans SC" panose="020B0200000000000000" charset="-122"/>
-            </a:endParaRPr>
           </a:p>
         </p:txBody>
       </p:sp>
@@ -19051,15 +19057,6 @@
               </a:rPr>
               <a:t>"这个结论怎么来的？那个数据源链接呢？"</a:t>
             </a:r>
-            <a:endParaRPr lang="en-US" sz="1800" b="1" i="0" u="none" strike="noStrike">
-              <a:solidFill>
-                <a:srgbClr val="0D1326"/>
-              </a:solidFill>
-              <a:latin typeface="Noto Sans SC" panose="020B0200000000000000" charset="-122"/>
-              <a:ea typeface="Noto Sans SC" panose="020B0200000000000000" charset="-122"/>
-              <a:cs typeface="Noto Sans SC" panose="020B0200000000000000" charset="-122"/>
-              <a:sym typeface="Noto Sans SC" panose="020B0200000000000000" charset="-122"/>
-            </a:endParaRPr>
           </a:p>
           <a:p>
             <a:pPr marL="0" indent="0" algn="l">
@@ -19079,15 +19076,6 @@
               </a:rPr>
               <a:t>你得翻两百条聊天记录，才能把当时的判断依据找出来。</a:t>
             </a:r>
-            <a:endParaRPr lang="en-US" sz="1800" b="0" i="0" u="none" strike="noStrike">
-              <a:solidFill>
-                <a:srgbClr val="475569"/>
-              </a:solidFill>
-              <a:latin typeface="Noto Sans SC" panose="020B0200000000000000" charset="-122"/>
-              <a:ea typeface="Noto Sans SC" panose="020B0200000000000000" charset="-122"/>
-              <a:cs typeface="Noto Sans SC" panose="020B0200000000000000" charset="-122"/>
-              <a:sym typeface="Noto Sans SC" panose="020B0200000000000000" charset="-122"/>
-            </a:endParaRPr>
           </a:p>
         </p:txBody>
       </p:sp>
@@ -19125,6 +19113,7 @@
             <a:pPr algn="ctr">
               <a:defRPr/>
             </a:pPr>
+            <a:endParaRPr/>
           </a:p>
         </p:txBody>
       </p:sp>
@@ -19407,7 +19396,7 @@
               <a:defRPr/>
             </a:pPr>
             <a:r>
-              <a:rPr lang="en-US" sz="8000" b="1" i="0" u="none" strike="noStrike">
+              <a:rPr lang="en-US" sz="7200" b="1" i="0" u="none" strike="noStrike" dirty="0">
                 <a:solidFill>
                   <a:srgbClr val="0D1326"/>
                 </a:solidFill>
@@ -19418,7 +19407,7 @@
               </a:rPr>
               <a:t>20%–55%</a:t>
             </a:r>
-            <a:endParaRPr lang="en-US" sz="1100"/>
+            <a:endParaRPr lang="en-US" sz="1050" dirty="0"/>
           </a:p>
         </p:txBody>
       </p:sp>
@@ -19682,15 +19671,6 @@
               </a:rPr>
               <a:t>。</a:t>
             </a:r>
-            <a:endParaRPr lang="en-US" sz="1500" b="0" i="0" u="none" strike="noStrike">
-              <a:solidFill>
-                <a:srgbClr val="475569"/>
-              </a:solidFill>
-              <a:latin typeface="Noto Sans SC" panose="020B0200000000000000" charset="-122"/>
-              <a:ea typeface="Noto Sans SC" panose="020B0200000000000000" charset="-122"/>
-              <a:cs typeface="Noto Sans SC" panose="020B0200000000000000" charset="-122"/>
-              <a:sym typeface="Noto Sans SC" panose="020B0200000000000000" charset="-122"/>
-            </a:endParaRPr>
           </a:p>
         </p:txBody>
       </p:sp>
@@ -19908,6 +19888,7 @@
             <a:pPr algn="ctr">
               <a:defRPr/>
             </a:pPr>
+            <a:endParaRPr/>
           </a:p>
         </p:txBody>
       </p:sp>
@@ -20012,6 +19993,7 @@
             <a:pPr algn="ctr">
               <a:defRPr/>
             </a:pPr>
+            <a:endParaRPr/>
           </a:p>
         </p:txBody>
       </p:sp>
@@ -20116,6 +20098,7 @@
             <a:pPr algn="ctr">
               <a:defRPr/>
             </a:pPr>
+            <a:endParaRPr/>
           </a:p>
         </p:txBody>
       </p:sp>
@@ -20220,6 +20203,7 @@
             <a:pPr algn="ctr">
               <a:defRPr/>
             </a:pPr>
+            <a:endParaRPr/>
           </a:p>
         </p:txBody>
       </p:sp>
@@ -20405,6 +20389,7 @@
             <a:pPr algn="ctr">
               <a:defRPr/>
             </a:pPr>
+            <a:endParaRPr/>
           </a:p>
         </p:txBody>
       </p:sp>
@@ -20509,6 +20494,7 @@
             <a:pPr algn="ctr">
               <a:defRPr/>
             </a:pPr>
+            <a:endParaRPr/>
           </a:p>
         </p:txBody>
       </p:sp>
@@ -20617,6 +20603,7 @@
             <a:pPr algn="ctr">
               <a:defRPr/>
             </a:pPr>
+            <a:endParaRPr/>
           </a:p>
         </p:txBody>
       </p:sp>
@@ -20730,15 +20717,6 @@
               </a:rPr>
               <a:t>· 工作上下文共享</a:t>
             </a:r>
-            <a:endParaRPr lang="en-US" sz="1400" b="0" i="0" u="none" strike="noStrike">
-              <a:solidFill>
-                <a:srgbClr val="475569"/>
-              </a:solidFill>
-              <a:latin typeface="Noto Sans SC" panose="020B0200000000000000" charset="-122"/>
-              <a:ea typeface="Noto Sans SC" panose="020B0200000000000000" charset="-122"/>
-              <a:cs typeface="Noto Sans SC" panose="020B0200000000000000" charset="-122"/>
-              <a:sym typeface="Noto Sans SC" panose="020B0200000000000000" charset="-122"/>
-            </a:endParaRPr>
           </a:p>
           <a:p>
             <a:pPr marL="0" indent="0" algn="l">
@@ -20758,15 +20736,6 @@
               </a:rPr>
               <a:t>· 方法/Skill 复用</a:t>
             </a:r>
-            <a:endParaRPr lang="en-US" sz="1400" b="0" i="0" u="none" strike="noStrike">
-              <a:solidFill>
-                <a:srgbClr val="475569"/>
-              </a:solidFill>
-              <a:latin typeface="Noto Sans SC" panose="020B0200000000000000" charset="-122"/>
-              <a:ea typeface="Noto Sans SC" panose="020B0200000000000000" charset="-122"/>
-              <a:cs typeface="Noto Sans SC" panose="020B0200000000000000" charset="-122"/>
-              <a:sym typeface="Noto Sans SC" panose="020B0200000000000000" charset="-122"/>
-            </a:endParaRPr>
           </a:p>
           <a:p>
             <a:pPr marL="0" indent="0" algn="l">
@@ -20786,15 +20755,6 @@
               </a:rPr>
               <a:t>· 执行记录与追溯</a:t>
             </a:r>
-            <a:endParaRPr lang="en-US" sz="1400" b="0" i="0" u="none" strike="noStrike">
-              <a:solidFill>
-                <a:srgbClr val="475569"/>
-              </a:solidFill>
-              <a:latin typeface="Noto Sans SC" panose="020B0200000000000000" charset="-122"/>
-              <a:ea typeface="Noto Sans SC" panose="020B0200000000000000" charset="-122"/>
-              <a:cs typeface="Noto Sans SC" panose="020B0200000000000000" charset="-122"/>
-              <a:sym typeface="Noto Sans SC" panose="020B0200000000000000" charset="-122"/>
-            </a:endParaRPr>
           </a:p>
           <a:p>
             <a:pPr marL="0" indent="0" algn="l">
@@ -20814,15 +20774,6 @@
               </a:rPr>
               <a:t>· 权限与用量治理</a:t>
             </a:r>
-            <a:endParaRPr lang="en-US" sz="1400" b="0" i="0" u="none" strike="noStrike">
-              <a:solidFill>
-                <a:srgbClr val="475569"/>
-              </a:solidFill>
-              <a:latin typeface="Noto Sans SC" panose="020B0200000000000000" charset="-122"/>
-              <a:ea typeface="Noto Sans SC" panose="020B0200000000000000" charset="-122"/>
-              <a:cs typeface="Noto Sans SC" panose="020B0200000000000000" charset="-122"/>
-              <a:sym typeface="Noto Sans SC" panose="020B0200000000000000" charset="-122"/>
-            </a:endParaRPr>
           </a:p>
         </p:txBody>
       </p:sp>
@@ -20869,15 +20820,6 @@
               </a:rPr>
               <a:t>这一层基本是空白</a:t>
             </a:r>
-            <a:endParaRPr lang="en-US" sz="1500" b="1" i="0" u="none" strike="noStrike">
-              <a:solidFill>
-                <a:srgbClr val="C9302C"/>
-              </a:solidFill>
-              <a:latin typeface="Noto Sans SC" panose="020B0200000000000000" charset="-122"/>
-              <a:ea typeface="Noto Sans SC" panose="020B0200000000000000" charset="-122"/>
-              <a:cs typeface="Noto Sans SC" panose="020B0200000000000000" charset="-122"/>
-              <a:sym typeface="Noto Sans SC" panose="020B0200000000000000" charset="-122"/>
-            </a:endParaRPr>
           </a:p>
         </p:txBody>
       </p:sp>
@@ -21670,14 +21612,6 @@
               </a:rPr>
               <a:t>子Agent</a:t>
             </a:r>
-            <a:endParaRPr lang="en-US" sz="1200">
-              <a:solidFill>
-                <a:schemeClr val="tx1"/>
-              </a:solidFill>
-              <a:latin typeface="Noto Sans SC" panose="020B0200000000000000" charset="-122"/>
-              <a:ea typeface="Noto Sans SC" panose="020B0200000000000000" charset="-122"/>
-              <a:cs typeface="Noto Sans SC" panose="020B0200000000000000" charset="-122"/>
-            </a:endParaRPr>
           </a:p>
         </p:txBody>
       </p:sp>
@@ -22733,15 +22667,6 @@
               </a:rPr>
               <a:t>A 读了 20</a:t>
             </a:r>
-            <a:endParaRPr lang="en-US" sz="1200" b="0" i="0" u="none" strike="noStrike">
-              <a:solidFill>
-                <a:srgbClr val="0D1326"/>
-              </a:solidFill>
-              <a:latin typeface="Noto Sans SC" panose="020B0200000000000000" charset="-122"/>
-              <a:ea typeface="Noto Sans SC" panose="020B0200000000000000" charset="-122"/>
-              <a:cs typeface="Noto Sans SC" panose="020B0200000000000000" charset="-122"/>
-              <a:sym typeface="Noto Sans SC" panose="020B0200000000000000" charset="-122"/>
-            </a:endParaRPr>
           </a:p>
           <a:p>
             <a:pPr marL="0" indent="0" algn="ctr">
@@ -22831,15 +22756,6 @@
               </a:rPr>
               <a:t>这些细节在压缩时已经被扔了；主线程再转述一次，又衰减一次</a:t>
             </a:r>
-            <a:endParaRPr lang="en-US" sz="1200" b="0" i="0" u="none" strike="noStrike">
-              <a:solidFill>
-                <a:srgbClr val="475569"/>
-              </a:solidFill>
-              <a:latin typeface="Noto Sans SC" panose="020B0200000000000000" charset="-122"/>
-              <a:ea typeface="Noto Sans SC" panose="020B0200000000000000" charset="-122"/>
-              <a:cs typeface="Noto Sans SC" panose="020B0200000000000000" charset="-122"/>
-              <a:sym typeface="Noto Sans SC" panose="020B0200000000000000" charset="-122"/>
-            </a:endParaRPr>
           </a:p>
         </p:txBody>
       </p:sp>
@@ -23148,15 +23064,6 @@
               </a:rPr>
               <a:t>这正是 P2 那个"同事接不住"的 agent 版本</a:t>
             </a:r>
-            <a:endParaRPr lang="en-US" sz="1200" b="0" i="0" u="none" strike="noStrike">
-              <a:solidFill>
-                <a:srgbClr val="475569"/>
-              </a:solidFill>
-              <a:latin typeface="Noto Sans SC" panose="020B0200000000000000" charset="-122"/>
-              <a:ea typeface="Noto Sans SC" panose="020B0200000000000000" charset="-122"/>
-              <a:cs typeface="Noto Sans SC" panose="020B0200000000000000" charset="-122"/>
-              <a:sym typeface="Noto Sans SC" panose="020B0200000000000000" charset="-122"/>
-            </a:endParaRPr>
           </a:p>
         </p:txBody>
       </p:sp>
@@ -23279,15 +23186,6 @@
               </a:rPr>
               <a:t>多个独立视角互相挑错，收敛到同一答案才可信；没收敛的分歧点，正好标出哪里有不确定性。</a:t>
             </a:r>
-            <a:endParaRPr lang="en-US" sz="1500" b="0" i="0" u="none" strike="noStrike">
-              <a:solidFill>
-                <a:srgbClr val="0D1326"/>
-              </a:solidFill>
-              <a:latin typeface="Noto Sans SC" panose="020B0200000000000000" charset="-122"/>
-              <a:ea typeface="Noto Sans SC" panose="020B0200000000000000" charset="-122"/>
-              <a:cs typeface="Noto Sans SC" panose="020B0200000000000000" charset="-122"/>
-              <a:sym typeface="Noto Sans SC" panose="020B0200000000000000" charset="-122"/>
-            </a:endParaRPr>
           </a:p>
         </p:txBody>
       </p:sp>
@@ -23423,14 +23321,6 @@
               </a:rPr>
               <a:t>转发至C</a:t>
             </a:r>
-            <a:endParaRPr lang="en-US" sz="1200">
-              <a:solidFill>
-                <a:srgbClr val="0D1326"/>
-              </a:solidFill>
-              <a:latin typeface="Noto Sans SC" panose="020B0200000000000000" charset="-122"/>
-              <a:ea typeface="Noto Sans SC" panose="020B0200000000000000" charset="-122"/>
-              <a:cs typeface="Noto Sans SC" panose="020B0200000000000000" charset="-122"/>
-            </a:endParaRPr>
           </a:p>
         </p:txBody>
       </p:sp>
@@ -23454,6 +23344,7 @@
           <a:bodyPr wrap="square" rtlCol="0" anchor="t">
             <a:spAutoFit/>
           </a:bodyPr>
+          <a:lstStyle/>
           <a:p>
             <a:pPr marL="0" indent="0" algn="ctr">
               <a:lnSpc>
@@ -23827,15 +23718,6 @@
               </a:rPr>
               <a:t>它买的不是算力效率，是"独立视角"这个更结构化的东西。</a:t>
             </a:r>
-            <a:endParaRPr lang="en-US" sz="1400" b="0" i="0" u="none" strike="noStrike">
-              <a:solidFill>
-                <a:srgbClr val="475569"/>
-              </a:solidFill>
-              <a:latin typeface="Noto Sans SC" panose="020B0200000000000000" charset="-122"/>
-              <a:ea typeface="Noto Sans SC" panose="020B0200000000000000" charset="-122"/>
-              <a:cs typeface="Noto Sans SC" panose="020B0200000000000000" charset="-122"/>
-              <a:sym typeface="Noto Sans SC" panose="020B0200000000000000" charset="-122"/>
-            </a:endParaRPr>
           </a:p>
         </p:txBody>
       </p:sp>
@@ -24078,6 +23960,7 @@
             <a:pPr algn="ctr">
               <a:defRPr/>
             </a:pPr>
+            <a:endParaRPr/>
           </a:p>
         </p:txBody>
       </p:sp>
@@ -24334,19 +24217,7 @@
                 <a:cs typeface="Noto Sans SC" panose="020B0200000000000000" charset="-122"/>
                 <a:sym typeface="Noto Sans SC" panose="020B0200000000000000" charset="-122"/>
               </a:rPr>
-              <a:t>“</a:t>
-            </a:r>
-            <a:r>
-              <a:rPr lang="en-US" sz="1600" b="1" i="0" u="none" strike="noStrike">
-                <a:solidFill>
-                  <a:srgbClr val="0D1326"/>
-                </a:solidFill>
-                <a:latin typeface="Noto Sans SC" panose="020B0200000000000000" charset="-122"/>
-                <a:ea typeface="Noto Sans SC" panose="020B0200000000000000" charset="-122"/>
-                <a:cs typeface="Noto Sans SC" panose="020B0200000000000000" charset="-122"/>
-                <a:sym typeface="Noto Sans SC" panose="020B0200000000000000" charset="-122"/>
-              </a:rPr>
-              <a:t>人接续人的工作”</a:t>
+              <a:t>“人接续人的工作”</a:t>
             </a:r>
             <a:r>
               <a:rPr lang="en-US" sz="1600" b="0" i="0" u="none" strike="noStrike">
@@ -24402,6 +24273,7 @@
             <a:pPr algn="ctr">
               <a:defRPr/>
             </a:pPr>
+            <a:endParaRPr/>
           </a:p>
         </p:txBody>
       </p:sp>
@@ -24515,15 +24387,6 @@
               </a:rPr>
               <a:t>。</a:t>
             </a:r>
-            <a:endParaRPr lang="zh-CN" altLang="en-US" sz="1200" b="0" i="0" u="none" strike="noStrike">
-              <a:solidFill>
-                <a:srgbClr val="475569"/>
-              </a:solidFill>
-              <a:latin typeface="Noto Sans SC" panose="020B0200000000000000" charset="-122"/>
-              <a:ea typeface="Noto Sans SC" panose="020B0200000000000000" charset="-122"/>
-              <a:cs typeface="Noto Sans SC" panose="020B0200000000000000" charset="-122"/>
-              <a:sym typeface="Noto Sans SC" panose="020B0200000000000000" charset="-122"/>
-            </a:endParaRPr>
           </a:p>
         </p:txBody>
       </p:sp>
@@ -24565,6 +24428,7 @@
             <a:pPr algn="ctr">
               <a:defRPr/>
             </a:pPr>
+            <a:endParaRPr/>
           </a:p>
         </p:txBody>
       </p:sp>
@@ -24702,15 +24566,6 @@
               </a:rPr>
               <a:t>。</a:t>
             </a:r>
-            <a:endParaRPr lang="zh-CN" altLang="en-US" sz="1200" b="0" i="0" u="none" strike="noStrike">
-              <a:solidFill>
-                <a:srgbClr val="475569"/>
-              </a:solidFill>
-              <a:latin typeface="Noto Sans SC" panose="020B0200000000000000" charset="-122"/>
-              <a:ea typeface="Noto Sans SC" panose="020B0200000000000000" charset="-122"/>
-              <a:cs typeface="Noto Sans SC" panose="020B0200000000000000" charset="-122"/>
-              <a:sym typeface="Noto Sans SC" panose="020B0200000000000000" charset="-122"/>
-            </a:endParaRPr>
           </a:p>
         </p:txBody>
       </p:sp>
@@ -24752,6 +24607,7 @@
             <a:pPr algn="ctr">
               <a:defRPr/>
             </a:pPr>
+            <a:endParaRPr/>
           </a:p>
         </p:txBody>
       </p:sp>
@@ -24865,15 +24721,6 @@
               </a:rPr>
               <a:t>。</a:t>
             </a:r>
-            <a:endParaRPr lang="zh-CN" altLang="en-US" sz="1200" b="0" i="0" u="none" strike="noStrike">
-              <a:solidFill>
-                <a:srgbClr val="475569"/>
-              </a:solidFill>
-              <a:latin typeface="Noto Sans SC" panose="020B0200000000000000" charset="-122"/>
-              <a:ea typeface="Noto Sans SC" panose="020B0200000000000000" charset="-122"/>
-              <a:cs typeface="Noto Sans SC" panose="020B0200000000000000" charset="-122"/>
-              <a:sym typeface="Noto Sans SC" panose="020B0200000000000000" charset="-122"/>
-            </a:endParaRPr>
           </a:p>
         </p:txBody>
       </p:sp>
@@ -24915,6 +24762,7 @@
             <a:pPr algn="ctr">
               <a:defRPr/>
             </a:pPr>
+            <a:endParaRPr/>
           </a:p>
         </p:txBody>
       </p:sp>
@@ -25028,15 +24876,6 @@
               </a:rPr>
               <a:t>。</a:t>
             </a:r>
-            <a:endParaRPr lang="zh-CN" altLang="en-US" sz="1200" b="0" i="0" u="none" strike="noStrike">
-              <a:solidFill>
-                <a:srgbClr val="475569"/>
-              </a:solidFill>
-              <a:latin typeface="Noto Sans SC" panose="020B0200000000000000" charset="-122"/>
-              <a:ea typeface="Noto Sans SC" panose="020B0200000000000000" charset="-122"/>
-              <a:cs typeface="Noto Sans SC" panose="020B0200000000000000" charset="-122"/>
-              <a:sym typeface="Noto Sans SC" panose="020B0200000000000000" charset="-122"/>
-            </a:endParaRPr>
           </a:p>
         </p:txBody>
       </p:sp>
@@ -25096,163 +24935,163 @@
 </file>
 
 <file path=ppt/tags/tag1.xml><?xml version="1.0" encoding="utf-8"?>
-<p:tagLst xmlns:p="http://schemas.openxmlformats.org/presentationml/2006/main">
+<p:tagLst xmlns:a="http://schemas.openxmlformats.org/drawingml/2006/main" xmlns:r="http://schemas.openxmlformats.org/officeDocument/2006/relationships" xmlns:p="http://schemas.openxmlformats.org/presentationml/2006/main">
   <p:tag name="KSO_WM_DIAGRAM_VIRTUALLY_FRAME" val="{&quot;height&quot;:262,&quot;left&quot;:80,&quot;top&quot;:190,&quot;width&quot;:400}"/>
 </p:tagLst>
 </file>
 
 <file path=ppt/tags/tag10.xml><?xml version="1.0" encoding="utf-8"?>
-<p:tagLst xmlns:p="http://schemas.openxmlformats.org/presentationml/2006/main">
+<p:tagLst xmlns:a="http://schemas.openxmlformats.org/drawingml/2006/main" xmlns:r="http://schemas.openxmlformats.org/officeDocument/2006/relationships" xmlns:p="http://schemas.openxmlformats.org/presentationml/2006/main">
   <p:tag name="KSO_WM_DIAGRAM_VIRTUALLY_FRAME" val="{&quot;height&quot;:262,&quot;left&quot;:80,&quot;top&quot;:190,&quot;width&quot;:400}"/>
 </p:tagLst>
 </file>
 
 <file path=ppt/tags/tag11.xml><?xml version="1.0" encoding="utf-8"?>
-<p:tagLst xmlns:p="http://schemas.openxmlformats.org/presentationml/2006/main">
+<p:tagLst xmlns:a="http://schemas.openxmlformats.org/drawingml/2006/main" xmlns:r="http://schemas.openxmlformats.org/officeDocument/2006/relationships" xmlns:p="http://schemas.openxmlformats.org/presentationml/2006/main">
   <p:tag name="KSO_WM_DIAGRAM_VIRTUALLY_FRAME" val="{&quot;height&quot;:262,&quot;left&quot;:80,&quot;top&quot;:190,&quot;width&quot;:400}"/>
 </p:tagLst>
 </file>
 
 <file path=ppt/tags/tag12.xml><?xml version="1.0" encoding="utf-8"?>
-<p:tagLst xmlns:p="http://schemas.openxmlformats.org/presentationml/2006/main">
+<p:tagLst xmlns:a="http://schemas.openxmlformats.org/drawingml/2006/main" xmlns:r="http://schemas.openxmlformats.org/officeDocument/2006/relationships" xmlns:p="http://schemas.openxmlformats.org/presentationml/2006/main">
   <p:tag name="KSO_WM_DIAGRAM_VIRTUALLY_FRAME" val="{&quot;height&quot;:262,&quot;left&quot;:80,&quot;top&quot;:190,&quot;width&quot;:400}"/>
 </p:tagLst>
 </file>
 
 <file path=ppt/tags/tag13.xml><?xml version="1.0" encoding="utf-8"?>
-<p:tagLst xmlns:p="http://schemas.openxmlformats.org/presentationml/2006/main">
+<p:tagLst xmlns:a="http://schemas.openxmlformats.org/drawingml/2006/main" xmlns:r="http://schemas.openxmlformats.org/officeDocument/2006/relationships" xmlns:p="http://schemas.openxmlformats.org/presentationml/2006/main">
   <p:tag name="KSO_WM_DIAGRAM_VIRTUALLY_FRAME" val="{&quot;height&quot;:262,&quot;left&quot;:80,&quot;top&quot;:190,&quot;width&quot;:400}"/>
 </p:tagLst>
 </file>
 
 <file path=ppt/tags/tag14.xml><?xml version="1.0" encoding="utf-8"?>
-<p:tagLst xmlns:p="http://schemas.openxmlformats.org/presentationml/2006/main">
+<p:tagLst xmlns:a="http://schemas.openxmlformats.org/drawingml/2006/main" xmlns:r="http://schemas.openxmlformats.org/officeDocument/2006/relationships" xmlns:p="http://schemas.openxmlformats.org/presentationml/2006/main">
   <p:tag name="KSO_WM_DIAGRAM_VIRTUALLY_FRAME" val="{&quot;height&quot;:262,&quot;left&quot;:80,&quot;top&quot;:190,&quot;width&quot;:400}"/>
 </p:tagLst>
 </file>
 
 <file path=ppt/tags/tag15.xml><?xml version="1.0" encoding="utf-8"?>
-<p:tagLst xmlns:p="http://schemas.openxmlformats.org/presentationml/2006/main">
+<p:tagLst xmlns:a="http://schemas.openxmlformats.org/drawingml/2006/main" xmlns:r="http://schemas.openxmlformats.org/officeDocument/2006/relationships" xmlns:p="http://schemas.openxmlformats.org/presentationml/2006/main">
   <p:tag name="KSO_WM_DIAGRAM_VIRTUALLY_FRAME" val="{&quot;height&quot;:262,&quot;left&quot;:80,&quot;top&quot;:190,&quot;width&quot;:400}"/>
 </p:tagLst>
 </file>
 
 <file path=ppt/tags/tag16.xml><?xml version="1.0" encoding="utf-8"?>
-<p:tagLst xmlns:p="http://schemas.openxmlformats.org/presentationml/2006/main">
+<p:tagLst xmlns:a="http://schemas.openxmlformats.org/drawingml/2006/main" xmlns:r="http://schemas.openxmlformats.org/officeDocument/2006/relationships" xmlns:p="http://schemas.openxmlformats.org/presentationml/2006/main">
   <p:tag name="KSO_WM_DIAGRAM_VIRTUALLY_FRAME" val="{&quot;height&quot;:205,&quot;left&quot;:80,&quot;top&quot;:210,&quot;width&quot;:800}"/>
 </p:tagLst>
 </file>
 
 <file path=ppt/tags/tag17.xml><?xml version="1.0" encoding="utf-8"?>
-<p:tagLst xmlns:p="http://schemas.openxmlformats.org/presentationml/2006/main">
+<p:tagLst xmlns:a="http://schemas.openxmlformats.org/drawingml/2006/main" xmlns:r="http://schemas.openxmlformats.org/officeDocument/2006/relationships" xmlns:p="http://schemas.openxmlformats.org/presentationml/2006/main">
   <p:tag name="KSO_WM_DIAGRAM_VIRTUALLY_FRAME" val="{&quot;height&quot;:205,&quot;left&quot;:80,&quot;top&quot;:210,&quot;width&quot;:800}"/>
 </p:tagLst>
 </file>
 
 <file path=ppt/tags/tag18.xml><?xml version="1.0" encoding="utf-8"?>
-<p:tagLst xmlns:p="http://schemas.openxmlformats.org/presentationml/2006/main">
+<p:tagLst xmlns:a="http://schemas.openxmlformats.org/drawingml/2006/main" xmlns:r="http://schemas.openxmlformats.org/officeDocument/2006/relationships" xmlns:p="http://schemas.openxmlformats.org/presentationml/2006/main">
   <p:tag name="KSO_WM_DIAGRAM_VIRTUALLY_FRAME" val="{&quot;height&quot;:205,&quot;left&quot;:80,&quot;top&quot;:210,&quot;width&quot;:800}"/>
 </p:tagLst>
 </file>
 
 <file path=ppt/tags/tag19.xml><?xml version="1.0" encoding="utf-8"?>
-<p:tagLst xmlns:p="http://schemas.openxmlformats.org/presentationml/2006/main">
+<p:tagLst xmlns:a="http://schemas.openxmlformats.org/drawingml/2006/main" xmlns:r="http://schemas.openxmlformats.org/officeDocument/2006/relationships" xmlns:p="http://schemas.openxmlformats.org/presentationml/2006/main">
   <p:tag name="KSO_WM_DIAGRAM_VIRTUALLY_FRAME" val="{&quot;height&quot;:205,&quot;left&quot;:80,&quot;top&quot;:210,&quot;width&quot;:800}"/>
 </p:tagLst>
 </file>
 
 <file path=ppt/tags/tag2.xml><?xml version="1.0" encoding="utf-8"?>
-<p:tagLst xmlns:p="http://schemas.openxmlformats.org/presentationml/2006/main">
+<p:tagLst xmlns:a="http://schemas.openxmlformats.org/drawingml/2006/main" xmlns:r="http://schemas.openxmlformats.org/officeDocument/2006/relationships" xmlns:p="http://schemas.openxmlformats.org/presentationml/2006/main">
   <p:tag name="KSO_WM_DIAGRAM_VIRTUALLY_FRAME" val="{&quot;height&quot;:262,&quot;left&quot;:80,&quot;top&quot;:190,&quot;width&quot;:400}"/>
 </p:tagLst>
 </file>
 
 <file path=ppt/tags/tag20.xml><?xml version="1.0" encoding="utf-8"?>
-<p:tagLst xmlns:p="http://schemas.openxmlformats.org/presentationml/2006/main">
+<p:tagLst xmlns:a="http://schemas.openxmlformats.org/drawingml/2006/main" xmlns:r="http://schemas.openxmlformats.org/officeDocument/2006/relationships" xmlns:p="http://schemas.openxmlformats.org/presentationml/2006/main">
   <p:tag name="KSO_WM_DIAGRAM_VIRTUALLY_FRAME" val="{&quot;height&quot;:205,&quot;left&quot;:80,&quot;top&quot;:210,&quot;width&quot;:800}"/>
 </p:tagLst>
 </file>
 
 <file path=ppt/tags/tag21.xml><?xml version="1.0" encoding="utf-8"?>
-<p:tagLst xmlns:p="http://schemas.openxmlformats.org/presentationml/2006/main">
+<p:tagLst xmlns:a="http://schemas.openxmlformats.org/drawingml/2006/main" xmlns:r="http://schemas.openxmlformats.org/officeDocument/2006/relationships" xmlns:p="http://schemas.openxmlformats.org/presentationml/2006/main">
   <p:tag name="KSO_WM_DIAGRAM_VIRTUALLY_FRAME" val="{&quot;height&quot;:205,&quot;left&quot;:80,&quot;top&quot;:210,&quot;width&quot;:800}"/>
 </p:tagLst>
 </file>
 
 <file path=ppt/tags/tag22.xml><?xml version="1.0" encoding="utf-8"?>
-<p:tagLst xmlns:p="http://schemas.openxmlformats.org/presentationml/2006/main">
+<p:tagLst xmlns:a="http://schemas.openxmlformats.org/drawingml/2006/main" xmlns:r="http://schemas.openxmlformats.org/officeDocument/2006/relationships" xmlns:p="http://schemas.openxmlformats.org/presentationml/2006/main">
   <p:tag name="KSO_WM_DIAGRAM_VIRTUALLY_FRAME" val="{&quot;height&quot;:205,&quot;left&quot;:80,&quot;top&quot;:210,&quot;width&quot;:800}"/>
 </p:tagLst>
 </file>
 
 <file path=ppt/tags/tag23.xml><?xml version="1.0" encoding="utf-8"?>
-<p:tagLst xmlns:p="http://schemas.openxmlformats.org/presentationml/2006/main">
+<p:tagLst xmlns:a="http://schemas.openxmlformats.org/drawingml/2006/main" xmlns:r="http://schemas.openxmlformats.org/officeDocument/2006/relationships" xmlns:p="http://schemas.openxmlformats.org/presentationml/2006/main">
   <p:tag name="KSO_WM_DIAGRAM_VIRTUALLY_FRAME" val="{&quot;height&quot;:205,&quot;left&quot;:80,&quot;top&quot;:210,&quot;width&quot;:800}"/>
 </p:tagLst>
 </file>
 
 <file path=ppt/tags/tag24.xml><?xml version="1.0" encoding="utf-8"?>
-<p:tagLst xmlns:p="http://schemas.openxmlformats.org/presentationml/2006/main">
+<p:tagLst xmlns:a="http://schemas.openxmlformats.org/drawingml/2006/main" xmlns:r="http://schemas.openxmlformats.org/officeDocument/2006/relationships" xmlns:p="http://schemas.openxmlformats.org/presentationml/2006/main">
   <p:tag name="KSO_WM_DIAGRAM_VIRTUALLY_FRAME" val="{&quot;height&quot;:205,&quot;left&quot;:80,&quot;top&quot;:210,&quot;width&quot;:800}"/>
 </p:tagLst>
 </file>
 
 <file path=ppt/tags/tag25.xml><?xml version="1.0" encoding="utf-8"?>
-<p:tagLst xmlns:p="http://schemas.openxmlformats.org/presentationml/2006/main">
+<p:tagLst xmlns:a="http://schemas.openxmlformats.org/drawingml/2006/main" xmlns:r="http://schemas.openxmlformats.org/officeDocument/2006/relationships" xmlns:p="http://schemas.openxmlformats.org/presentationml/2006/main">
   <p:tag name="KSO_WM_DIAGRAM_VIRTUALLY_FRAME" val="{&quot;height&quot;:205,&quot;left&quot;:80,&quot;top&quot;:210,&quot;width&quot;:800}"/>
 </p:tagLst>
 </file>
 
 <file path=ppt/tags/tag26.xml><?xml version="1.0" encoding="utf-8"?>
-<p:tagLst xmlns:p="http://schemas.openxmlformats.org/presentationml/2006/main">
+<p:tagLst xmlns:a="http://schemas.openxmlformats.org/drawingml/2006/main" xmlns:r="http://schemas.openxmlformats.org/officeDocument/2006/relationships" xmlns:p="http://schemas.openxmlformats.org/presentationml/2006/main">
   <p:tag name="KSO_WM_DIAGRAM_VIRTUALLY_FRAME" val="{&quot;height&quot;:205,&quot;left&quot;:80,&quot;top&quot;:210,&quot;width&quot;:800}"/>
 </p:tagLst>
 </file>
 
 <file path=ppt/tags/tag27.xml><?xml version="1.0" encoding="utf-8"?>
-<p:tagLst xmlns:p="http://schemas.openxmlformats.org/presentationml/2006/main">
+<p:tagLst xmlns:a="http://schemas.openxmlformats.org/drawingml/2006/main" xmlns:r="http://schemas.openxmlformats.org/officeDocument/2006/relationships" xmlns:p="http://schemas.openxmlformats.org/presentationml/2006/main">
   <p:tag name="KSO_WM_DIAGRAM_VIRTUALLY_FRAME" val="{&quot;height&quot;:205,&quot;left&quot;:80,&quot;top&quot;:210,&quot;width&quot;:800}"/>
 </p:tagLst>
 </file>
 
 <file path=ppt/tags/tag3.xml><?xml version="1.0" encoding="utf-8"?>
-<p:tagLst xmlns:p="http://schemas.openxmlformats.org/presentationml/2006/main">
+<p:tagLst xmlns:a="http://schemas.openxmlformats.org/drawingml/2006/main" xmlns:r="http://schemas.openxmlformats.org/officeDocument/2006/relationships" xmlns:p="http://schemas.openxmlformats.org/presentationml/2006/main">
   <p:tag name="KSO_WM_DIAGRAM_VIRTUALLY_FRAME" val="{&quot;height&quot;:262,&quot;left&quot;:80,&quot;top&quot;:190,&quot;width&quot;:400}"/>
 </p:tagLst>
 </file>
 
 <file path=ppt/tags/tag4.xml><?xml version="1.0" encoding="utf-8"?>
-<p:tagLst xmlns:p="http://schemas.openxmlformats.org/presentationml/2006/main">
+<p:tagLst xmlns:a="http://schemas.openxmlformats.org/drawingml/2006/main" xmlns:r="http://schemas.openxmlformats.org/officeDocument/2006/relationships" xmlns:p="http://schemas.openxmlformats.org/presentationml/2006/main">
   <p:tag name="KSO_WM_DIAGRAM_VIRTUALLY_FRAME" val="{&quot;height&quot;:262,&quot;left&quot;:80,&quot;top&quot;:190,&quot;width&quot;:400}"/>
 </p:tagLst>
 </file>
 
 <file path=ppt/tags/tag5.xml><?xml version="1.0" encoding="utf-8"?>
-<p:tagLst xmlns:p="http://schemas.openxmlformats.org/presentationml/2006/main">
+<p:tagLst xmlns:a="http://schemas.openxmlformats.org/drawingml/2006/main" xmlns:r="http://schemas.openxmlformats.org/officeDocument/2006/relationships" xmlns:p="http://schemas.openxmlformats.org/presentationml/2006/main">
   <p:tag name="KSO_WM_DIAGRAM_VIRTUALLY_FRAME" val="{&quot;height&quot;:262,&quot;left&quot;:80,&quot;top&quot;:190,&quot;width&quot;:400}"/>
 </p:tagLst>
 </file>
 
 <file path=ppt/tags/tag6.xml><?xml version="1.0" encoding="utf-8"?>
-<p:tagLst xmlns:p="http://schemas.openxmlformats.org/presentationml/2006/main">
+<p:tagLst xmlns:a="http://schemas.openxmlformats.org/drawingml/2006/main" xmlns:r="http://schemas.openxmlformats.org/officeDocument/2006/relationships" xmlns:p="http://schemas.openxmlformats.org/presentationml/2006/main">
   <p:tag name="KSO_WM_DIAGRAM_VIRTUALLY_FRAME" val="{&quot;height&quot;:262,&quot;left&quot;:80,&quot;top&quot;:190,&quot;width&quot;:400}"/>
 </p:tagLst>
 </file>
 
 <file path=ppt/tags/tag7.xml><?xml version="1.0" encoding="utf-8"?>
-<p:tagLst xmlns:p="http://schemas.openxmlformats.org/presentationml/2006/main">
+<p:tagLst xmlns:a="http://schemas.openxmlformats.org/drawingml/2006/main" xmlns:r="http://schemas.openxmlformats.org/officeDocument/2006/relationships" xmlns:p="http://schemas.openxmlformats.org/presentationml/2006/main">
   <p:tag name="KSO_WM_DIAGRAM_VIRTUALLY_FRAME" val="{&quot;height&quot;:262,&quot;left&quot;:80,&quot;top&quot;:190,&quot;width&quot;:400}"/>
 </p:tagLst>
 </file>
 
 <file path=ppt/tags/tag8.xml><?xml version="1.0" encoding="utf-8"?>
-<p:tagLst xmlns:p="http://schemas.openxmlformats.org/presentationml/2006/main">
+<p:tagLst xmlns:a="http://schemas.openxmlformats.org/drawingml/2006/main" xmlns:r="http://schemas.openxmlformats.org/officeDocument/2006/relationships" xmlns:p="http://schemas.openxmlformats.org/presentationml/2006/main">
   <p:tag name="KSO_WM_DIAGRAM_VIRTUALLY_FRAME" val="{&quot;height&quot;:262,&quot;left&quot;:80,&quot;top&quot;:190,&quot;width&quot;:400}"/>
 </p:tagLst>
 </file>
 
 <file path=ppt/tags/tag9.xml><?xml version="1.0" encoding="utf-8"?>
-<p:tagLst xmlns:p="http://schemas.openxmlformats.org/presentationml/2006/main">
+<p:tagLst xmlns:a="http://schemas.openxmlformats.org/drawingml/2006/main" xmlns:r="http://schemas.openxmlformats.org/officeDocument/2006/relationships" xmlns:p="http://schemas.openxmlformats.org/presentationml/2006/main">
   <p:tag name="KSO_WM_DIAGRAM_VIRTUALLY_FRAME" val="{&quot;height&quot;:262,&quot;left&quot;:80,&quot;top&quot;:190,&quot;width&quot;:400}"/>
 </p:tagLst>
 </file>
@@ -25533,6 +25372,8 @@
       </a:bgFillStyleLst>
     </a:fmtScheme>
   </a:themeElements>
+  <a:objectDefaults/>
+  <a:extraClrSchemeLst/>
   <a:extLst>
     <a:ext uri="{05A4C25C-085E-4340-85A3-A5531E510DB2}">
       <thm15:themeFamily xmlns:thm15="http://schemas.microsoft.com/office/thememl/2012/main" name="Office Theme" id="{62F939B6-93AF-4DB8-9C6B-D6C7DFDC589F}" vid="{4A3C46E8-61CC-4603-A589-7422A47A8E4A}"/>
@@ -25817,6 +25658,8 @@
       </a:bgFillStyleLst>
     </a:fmtScheme>
   </a:themeElements>
+  <a:objectDefaults/>
+  <a:extraClrSchemeLst/>
   <a:extLst>
     <a:ext uri="{05A4C25C-085E-4340-85A3-A5531E510DB2}">
       <thm15:themeFamily xmlns:thm15="http://schemas.microsoft.com/office/thememl/2012/main" name="Office Theme" id="{62F939B6-93AF-4DB8-9C6B-D6C7DFDC589F}" vid="{4A3C46E8-61CC-4603-A589-7422A47A8E4A}"/>
@@ -26101,6 +25944,8 @@
       </a:bgFillStyleLst>
     </a:fmtScheme>
   </a:themeElements>
+  <a:objectDefaults/>
+  <a:extraClrSchemeLst/>
   <a:extLst>
     <a:ext uri="{05A4C25C-085E-4340-85A3-A5531E510DB2}">
       <thm15:themeFamily xmlns:thm15="http://schemas.microsoft.com/office/thememl/2012/main" name="Office Theme" id="{62F939B6-93AF-4DB8-9C6B-D6C7DFDC589F}" vid="{4A3C46E8-61CC-4603-A589-7422A47A8E4A}"/>
